--- a/ppt자료/우스레-공방-프로그램-제안.pptx
+++ b/ppt자료/우스레-공방-프로그램-제안.pptx
@@ -10021,12 +10021,12 @@
 </file>
 
 <file path=ppt/slides/slide18.xml><?xml version="1.0" encoding="utf-8"?>
-<p:sld xmlns:p="http://schemas.openxmlformats.org/presentationml/2006/main" xmlns:a="http://schemas.openxmlformats.org/drawingml/2006/main" xmlns:r="http://schemas.openxmlformats.org/officeDocument/2006/relationships">
+<p:sld xmlns:r="http://schemas.openxmlformats.org/officeDocument/2006/relationships" xmlns:c="http://schemas.openxmlformats.org/drawingml/2006/chart" xmlns:a="http://schemas.openxmlformats.org/drawingml/2006/main" xmlns:dgm="http://schemas.openxmlformats.org/drawingml/2006/diagram" xmlns:dsp="http://schemas.microsoft.com/office/drawing/2008/diagram" xmlns:p="http://schemas.openxmlformats.org/presentationml/2006/main">
   <p:cSld>
     <p:bg>
-      <p:bgPr>
+      <p:bgPr shadeToTitle="0">
         <a:solidFill>
-          <a:srgbClr val="EFEBE7"/>
+          <a:srgbClr val="efebe7"/>
         </a:solidFill>
       </p:bgPr>
     </p:bg>
@@ -10149,7 +10149,7 @@
           <p:nvPr/>
         </p:nvPicPr>
         <p:blipFill>
-          <a:blip r:embed="rId5"/>
+          <a:blip r:embed="rId6"/>
           <a:stretch>
             <a:fillRect/>
           </a:stretch>
@@ -10173,7 +10173,7 @@
           <p:nvPr/>
         </p:nvPicPr>
         <p:blipFill>
-          <a:blip r:embed="rId6"/>
+          <a:blip r:embed="rId7"/>
           <a:stretch>
             <a:fillRect/>
           </a:stretch>
@@ -10197,7 +10197,7 @@
           <p:nvPr/>
         </p:nvPicPr>
         <p:blipFill>
-          <a:blip r:embed="rId7"/>
+          <a:blip r:embed="rId8"/>
           <a:stretch>
             <a:fillRect/>
           </a:stretch>
@@ -10214,12 +10214,12 @@
       </p:pic>
       <p:sp>
         <p:nvSpPr>
-          <p:cNvPr name="TextBox 9" id="9"/>
-          <p:cNvSpPr txBox="true"/>
+          <p:cNvPr id="9" name="TextBox 9"/>
+          <p:cNvSpPr txBox="1"/>
           <p:nvPr/>
         </p:nvSpPr>
         <p:spPr>
-          <a:xfrm rot="0">
+          <a:xfrm>
             <a:off x="2603500" y="4191000"/>
             <a:ext cx="14249400" cy="2933700"/>
           </a:xfrm>
@@ -10228,16 +10228,17 @@
           </a:prstGeom>
         </p:spPr>
         <p:txBody>
-          <a:bodyPr anchor="ctr" rtlCol="false" lIns="0" tIns="0" rIns="0" bIns="0"/>
+          <a:bodyPr lIns="0" tIns="0" rIns="0" bIns="0" anchor="ctr"/>
           <a:lstStyle/>
           <a:p>
-            <a:pPr algn="l" lvl="0">
+            <a:pPr lvl="0" algn="l">
               <a:lnSpc>
-                <a:spcPct val="128650"/>
+                <a:spcPct val="128649"/>
               </a:lnSpc>
+              <a:defRPr/>
             </a:pPr>
             <a:r>
-              <a:rPr lang="ko-KR" sz="3800" b="false" i="false" u="none" strike="noStrike">
+              <a:rPr lang="ko-KR" sz="3800" b="0" i="0" u="none" strike="noStrike">
                 <a:solidFill>
                   <a:srgbClr val="715130"/>
                 </a:solidFill>
@@ -10246,7 +10247,7 @@
               <a:t>출장형</a:t>
             </a:r>
             <a:r>
-              <a:rPr lang="en-US" sz="3800" b="false" i="false" u="none" strike="noStrike">
+              <a:rPr lang="en-US" sz="3800" b="0" i="0" u="none" strike="noStrike">
                 <a:solidFill>
                   <a:srgbClr val="715130"/>
                 </a:solidFill>
@@ -10255,7 +10256,7 @@
               <a:t>(</a:t>
             </a:r>
             <a:r>
-              <a:rPr lang="ko-KR" sz="3800" b="false" i="false" u="none" strike="noStrike">
+              <a:rPr lang="ko-KR" sz="3800" b="0" i="0" u="none" strike="noStrike">
                 <a:solidFill>
                   <a:srgbClr val="715130"/>
                 </a:solidFill>
@@ -10264,7 +10265,7 @@
               <a:t>기관</a:t>
             </a:r>
             <a:r>
-              <a:rPr lang="en-US" sz="3800" b="false" i="false" u="none" strike="noStrike">
+              <a:rPr lang="en-US" sz="3800" b="0" i="0" u="none" strike="noStrike">
                 <a:solidFill>
                   <a:srgbClr val="715130"/>
                 </a:solidFill>
@@ -10273,7 +10274,7 @@
               <a:t>·</a:t>
             </a:r>
             <a:r>
-              <a:rPr lang="ko-KR" sz="3800" b="false" i="false" u="none" strike="noStrike">
+              <a:rPr lang="ko-KR" sz="3800" b="0" i="0" u="none" strike="noStrike">
                 <a:solidFill>
                   <a:srgbClr val="715130"/>
                 </a:solidFill>
@@ -10282,7 +10283,7 @@
               <a:t>기업</a:t>
             </a:r>
             <a:r>
-              <a:rPr lang="en-US" sz="3800" b="false" i="false" u="none" strike="noStrike">
+              <a:rPr lang="en-US" sz="3800" b="0" i="0" u="none" strike="noStrike">
                 <a:solidFill>
                   <a:srgbClr val="715130"/>
                 </a:solidFill>
@@ -10291,7 +10292,7 @@
               <a:t>): </a:t>
             </a:r>
             <a:r>
-              <a:rPr lang="ko-KR" sz="3800" b="false" i="false" u="none" strike="noStrike">
+              <a:rPr lang="ko-KR" sz="3800" b="0" i="0" u="none" strike="noStrike">
                 <a:solidFill>
                   <a:srgbClr val="715130"/>
                 </a:solidFill>
@@ -10300,7 +10301,7 @@
               <a:t>최대</a:t>
             </a:r>
             <a:r>
-              <a:rPr lang="en-US" sz="3800" b="false" i="false" u="none" strike="noStrike">
+              <a:rPr lang="en-US" sz="3800" b="0" i="0" u="none" strike="noStrike">
                 <a:solidFill>
                   <a:srgbClr val="715130"/>
                 </a:solidFill>
@@ -10309,7 +10310,7 @@
               <a:t> 50</a:t>
             </a:r>
             <a:r>
-              <a:rPr lang="ko-KR" sz="3800" b="false" i="false" u="none" strike="noStrike">
+              <a:rPr lang="ko-KR" sz="3800" b="0" i="0" u="none" strike="noStrike">
                 <a:solidFill>
                   <a:srgbClr val="715130"/>
                 </a:solidFill>
@@ -10318,7 +10319,7 @@
               <a:t>명</a:t>
             </a:r>
             <a:r>
-              <a:rPr lang="en-US" sz="3800" b="false" i="false" u="none" strike="noStrike">
+              <a:rPr lang="en-US" sz="3800" b="0" i="0" u="none" strike="noStrike">
                 <a:solidFill>
                   <a:srgbClr val="715130"/>
                 </a:solidFill>
@@ -10327,7 +10328,7 @@
               <a:t> / 2</a:t>
             </a:r>
             <a:r>
-              <a:rPr lang="ko-KR" sz="3800" b="false" i="false" u="none" strike="noStrike">
+              <a:rPr lang="ko-KR" sz="3800" b="0" i="0" u="none" strike="noStrike">
                 <a:solidFill>
                   <a:srgbClr val="715130"/>
                 </a:solidFill>
@@ -10336,7 +10337,7 @@
               <a:t>시간</a:t>
             </a:r>
             <a:r>
-              <a:rPr lang="en-US" sz="3800" b="false" i="false" u="none" strike="noStrike">
+              <a:rPr lang="en-US" sz="3800" b="0" i="0" u="none" strike="noStrike">
                 <a:solidFill>
                   <a:srgbClr val="715130"/>
                 </a:solidFill>
@@ -10345,7 +10346,7 @@
               <a:t> / 1</a:t>
             </a:r>
             <a:r>
-              <a:rPr lang="ko-KR" sz="3800" b="false" i="false" u="none" strike="noStrike">
+              <a:rPr lang="ko-KR" sz="3800" b="0" i="0" u="none" strike="noStrike">
                 <a:solidFill>
                   <a:srgbClr val="715130"/>
                 </a:solidFill>
@@ -10354,7 +10355,7 @@
               <a:t>인</a:t>
             </a:r>
             <a:r>
-              <a:rPr lang="en-US" sz="3800" b="false" i="false" u="none" strike="noStrike">
+              <a:rPr lang="en-US" sz="3800" b="0" i="0" u="none" strike="noStrike">
                 <a:solidFill>
                   <a:srgbClr val="715130"/>
                 </a:solidFill>
@@ -10363,7 +10364,7 @@
               <a:t> 70,000</a:t>
             </a:r>
             <a:r>
-              <a:rPr lang="ko-KR" sz="3800" b="false" i="false" u="none" strike="noStrike">
+              <a:rPr lang="ko-KR" sz="3800" b="0" i="0" u="none" strike="noStrike">
                 <a:solidFill>
                   <a:srgbClr val="715130"/>
                 </a:solidFill>
@@ -10371,15 +10372,22 @@
               </a:rPr>
               <a:t>원</a:t>
             </a:r>
-          </a:p>
-          <a:p>
-            <a:pPr algn="l" lvl="0">
+            <a:endParaRPr lang="ko-KR" sz="3800" b="0" i="0" u="none" strike="noStrike">
+              <a:solidFill>
+                <a:srgbClr val="715130"/>
+              </a:solidFill>
+              <a:ea typeface="Pretendard Bold"/>
+            </a:endParaRPr>
+          </a:p>
+          <a:p>
+            <a:pPr lvl="0" algn="l">
               <a:lnSpc>
-                <a:spcPct val="128650"/>
+                <a:spcPct val="128649"/>
               </a:lnSpc>
+              <a:defRPr/>
             </a:pPr>
             <a:r>
-              <a:rPr lang="ko-KR" sz="3800" b="false" i="false" u="none" strike="noStrike">
+              <a:rPr lang="ko-KR" sz="3800" b="0" i="0" u="none" strike="noStrike">
                 <a:solidFill>
                   <a:srgbClr val="715130"/>
                 </a:solidFill>
@@ -10388,7 +10396,7 @@
               <a:t>공방형</a:t>
             </a:r>
             <a:r>
-              <a:rPr lang="en-US" sz="3800" b="false" i="false" u="none" strike="noStrike">
+              <a:rPr lang="en-US" sz="3800" b="0" i="0" u="none" strike="noStrike">
                 <a:solidFill>
                   <a:srgbClr val="715130"/>
                 </a:solidFill>
@@ -10397,7 +10405,7 @@
               <a:t>(</a:t>
             </a:r>
             <a:r>
-              <a:rPr lang="ko-KR" sz="3800" b="false" i="false" u="none" strike="noStrike">
+              <a:rPr lang="ko-KR" sz="3800" b="0" i="0" u="none" strike="noStrike">
                 <a:solidFill>
                   <a:srgbClr val="715130"/>
                 </a:solidFill>
@@ -10406,7 +10414,7 @@
               <a:t>시민</a:t>
             </a:r>
             <a:r>
-              <a:rPr lang="en-US" sz="3800" b="false" i="false" u="none" strike="noStrike">
+              <a:rPr lang="en-US" sz="3800" b="0" i="0" u="none" strike="noStrike">
                 <a:solidFill>
                   <a:srgbClr val="715130"/>
                 </a:solidFill>
@@ -10415,7 +10423,7 @@
               <a:t>): </a:t>
             </a:r>
             <a:r>
-              <a:rPr lang="ko-KR" sz="3800" b="false" i="false" u="none" strike="noStrike">
+              <a:rPr lang="ko-KR" sz="3800" b="0" i="0" u="none" strike="noStrike">
                 <a:solidFill>
                   <a:srgbClr val="715130"/>
                 </a:solidFill>
@@ -10424,7 +10432,7 @@
               <a:t>최대</a:t>
             </a:r>
             <a:r>
-              <a:rPr lang="en-US" sz="3800" b="false" i="false" u="none" strike="noStrike">
+              <a:rPr lang="en-US" sz="3800" b="0" i="0" u="none" strike="noStrike">
                 <a:solidFill>
                   <a:srgbClr val="715130"/>
                 </a:solidFill>
@@ -10433,7 +10441,7 @@
               <a:t> 10</a:t>
             </a:r>
             <a:r>
-              <a:rPr lang="ko-KR" sz="3800" b="false" i="false" u="none" strike="noStrike">
+              <a:rPr lang="ko-KR" sz="3800" b="0" i="0" u="none" strike="noStrike">
                 <a:solidFill>
                   <a:srgbClr val="715130"/>
                 </a:solidFill>
@@ -10442,7 +10450,7 @@
               <a:t>명</a:t>
             </a:r>
             <a:r>
-              <a:rPr lang="en-US" sz="3800" b="false" i="false" u="none" strike="noStrike">
+              <a:rPr lang="en-US" sz="3800" b="0" i="0" u="none" strike="noStrike">
                 <a:solidFill>
                   <a:srgbClr val="715130"/>
                 </a:solidFill>
@@ -10451,7 +10459,7 @@
               <a:t> / 2</a:t>
             </a:r>
             <a:r>
-              <a:rPr lang="ko-KR" sz="3800" b="false" i="false" u="none" strike="noStrike">
+              <a:rPr lang="ko-KR" sz="3800" b="0" i="0" u="none" strike="noStrike">
                 <a:solidFill>
                   <a:srgbClr val="715130"/>
                 </a:solidFill>
@@ -10460,7 +10468,7 @@
               <a:t>시간</a:t>
             </a:r>
             <a:r>
-              <a:rPr lang="en-US" sz="3800" b="false" i="false" u="none" strike="noStrike">
+              <a:rPr lang="en-US" sz="3800" b="0" i="0" u="none" strike="noStrike">
                 <a:solidFill>
                   <a:srgbClr val="715130"/>
                 </a:solidFill>
@@ -10469,7 +10477,7 @@
               <a:t> / </a:t>
             </a:r>
             <a:r>
-              <a:rPr lang="ko-KR" sz="3800" b="false" i="false" u="none" strike="noStrike">
+              <a:rPr lang="ko-KR" sz="3800" b="0" i="0" u="none" strike="noStrike">
                 <a:solidFill>
                   <a:srgbClr val="715130"/>
                 </a:solidFill>
@@ -10478,16 +10486,16 @@
               <a:t>동일</a:t>
             </a:r>
             <a:r>
-              <a:rPr lang="en-US" sz="3800" b="false" i="false" u="none" strike="noStrike">
-                <a:solidFill>
-                  <a:srgbClr val="715130"/>
-                </a:solidFill>
-                <a:latin typeface="Pretendard Bold"/>
-              </a:rPr>
-              <a:t> </a:t>
-            </a:r>
-            <a:r>
-              <a:rPr lang="ko-KR" sz="3800" b="false" i="false" u="none" strike="noStrike">
+              <a:rPr lang="en-US" sz="3800" b="0" i="0" u="none" strike="noStrike">
+                <a:solidFill>
+                  <a:srgbClr val="715130"/>
+                </a:solidFill>
+                <a:latin typeface="Pretendard Bold"/>
+              </a:rPr>
+              <a:t> </a:t>
+            </a:r>
+            <a:r>
+              <a:rPr lang="ko-KR" sz="3800" b="0" i="0" u="none" strike="noStrike">
                 <a:solidFill>
                   <a:srgbClr val="715130"/>
                 </a:solidFill>
@@ -10495,15 +10503,22 @@
               </a:rPr>
               <a:t>조건</a:t>
             </a:r>
-          </a:p>
-          <a:p>
-            <a:pPr algn="l" lvl="0">
+            <a:endParaRPr lang="ko-KR" sz="3800" b="0" i="0" u="none" strike="noStrike">
+              <a:solidFill>
+                <a:srgbClr val="715130"/>
+              </a:solidFill>
+              <a:ea typeface="Pretendard Bold"/>
+            </a:endParaRPr>
+          </a:p>
+          <a:p>
+            <a:pPr lvl="0" algn="l">
               <a:lnSpc>
-                <a:spcPct val="128650"/>
+                <a:spcPct val="128649"/>
               </a:lnSpc>
+              <a:defRPr/>
             </a:pPr>
             <a:r>
-              <a:rPr lang="ko-KR" sz="3800" b="false" i="false" u="none" strike="noStrike">
+              <a:rPr lang="ko-KR" sz="3800" b="0" i="0" u="none" strike="noStrike">
                 <a:solidFill>
                   <a:srgbClr val="715130"/>
                 </a:solidFill>
@@ -10512,7 +10527,7 @@
               <a:t>학교형</a:t>
             </a:r>
             <a:r>
-              <a:rPr lang="en-US" sz="3800" b="false" i="false" u="none" strike="noStrike">
+              <a:rPr lang="en-US" sz="3800" b="0" i="0" u="none" strike="noStrike">
                 <a:solidFill>
                   <a:srgbClr val="715130"/>
                 </a:solidFill>
@@ -10521,7 +10536,7 @@
               <a:t>: 30</a:t>
             </a:r>
             <a:r>
-              <a:rPr lang="ko-KR" sz="3800" b="false" i="false" u="none" strike="noStrike">
+              <a:rPr lang="ko-KR" sz="3800" b="0" i="0" u="none" strike="noStrike">
                 <a:solidFill>
                   <a:srgbClr val="715130"/>
                 </a:solidFill>
@@ -10530,16 +10545,16 @@
               <a:t>명</a:t>
             </a:r>
             <a:r>
-              <a:rPr lang="en-US" sz="3800" b="false" i="false" u="none" strike="noStrike">
-                <a:solidFill>
-                  <a:srgbClr val="715130"/>
-                </a:solidFill>
-                <a:latin typeface="Pretendard Bold"/>
-              </a:rPr>
-              <a:t> </a:t>
-            </a:r>
-            <a:r>
-              <a:rPr lang="ko-KR" sz="3800" b="false" i="false" u="none" strike="noStrike">
+              <a:rPr lang="en-US" sz="3800" b="0" i="0" u="none" strike="noStrike">
+                <a:solidFill>
+                  <a:srgbClr val="715130"/>
+                </a:solidFill>
+                <a:latin typeface="Pretendard Bold"/>
+              </a:rPr>
+              <a:t> </a:t>
+            </a:r>
+            <a:r>
+              <a:rPr lang="ko-KR" sz="3800" b="0" i="0" u="none" strike="noStrike">
                 <a:solidFill>
                   <a:srgbClr val="715130"/>
                 </a:solidFill>
@@ -10548,7 +10563,7 @@
               <a:t>내외</a:t>
             </a:r>
             <a:r>
-              <a:rPr lang="en-US" sz="3800" b="false" i="false" u="none" strike="noStrike">
+              <a:rPr lang="en-US" sz="3800" b="0" i="0" u="none" strike="noStrike">
                 <a:solidFill>
                   <a:srgbClr val="715130"/>
                 </a:solidFill>
@@ -10557,7 +10572,7 @@
               <a:t> / </a:t>
             </a:r>
             <a:r>
-              <a:rPr lang="ko-KR" sz="3800" b="false" i="false" u="none" strike="noStrike">
+              <a:rPr lang="ko-KR" sz="3800" b="0" i="0" u="none" strike="noStrike">
                 <a:solidFill>
                   <a:srgbClr val="715130"/>
                 </a:solidFill>
@@ -10566,7 +10581,7 @@
               <a:t>재료비</a:t>
             </a:r>
             <a:r>
-              <a:rPr lang="en-US" sz="3800" b="false" i="false" u="none" strike="noStrike">
+              <a:rPr lang="en-US" sz="3800" b="0" i="0" u="none" strike="noStrike">
                 <a:solidFill>
                   <a:srgbClr val="715130"/>
                 </a:solidFill>
@@ -10575,7 +10590,7 @@
               <a:t> 20,000</a:t>
             </a:r>
             <a:r>
-              <a:rPr lang="ko-KR" sz="3800" b="false" i="false" u="none" strike="noStrike">
+              <a:rPr lang="ko-KR" sz="3800" b="0" i="0" u="none" strike="noStrike">
                 <a:solidFill>
                   <a:srgbClr val="715130"/>
                 </a:solidFill>
@@ -10584,7 +10599,7 @@
               <a:t>원</a:t>
             </a:r>
             <a:r>
-              <a:rPr lang="en-US" sz="3800" b="false" i="false" u="none" strike="noStrike">
+              <a:rPr lang="en-US" sz="3800" b="0" i="0" u="none" strike="noStrike">
                 <a:solidFill>
                   <a:srgbClr val="715130"/>
                 </a:solidFill>
@@ -10593,7 +10608,7 @@
               <a:t> / </a:t>
             </a:r>
             <a:r>
-              <a:rPr lang="ko-KR" sz="3800" b="false" i="false" u="none" strike="noStrike">
+              <a:rPr lang="ko-KR" sz="3800" b="0" i="0" u="none" strike="noStrike">
                 <a:solidFill>
                   <a:srgbClr val="715130"/>
                 </a:solidFill>
@@ -10602,7 +10617,7 @@
               <a:t>강사비</a:t>
             </a:r>
             <a:r>
-              <a:rPr lang="en-US" sz="3800" b="false" i="false" u="none" strike="noStrike">
+              <a:rPr lang="en-US" sz="3800" b="0" i="0" u="none" strike="noStrike">
                 <a:solidFill>
                   <a:srgbClr val="715130"/>
                 </a:solidFill>
@@ -10611,7 +10626,7 @@
               <a:t> 100,000</a:t>
             </a:r>
             <a:r>
-              <a:rPr lang="ko-KR" sz="3800" b="false" i="false" u="none" strike="noStrike">
+              <a:rPr lang="ko-KR" sz="3800" b="0" i="0" u="none" strike="noStrike">
                 <a:solidFill>
                   <a:srgbClr val="715130"/>
                 </a:solidFill>
@@ -10620,16 +10635,25 @@
               <a:t>원</a:t>
             </a:r>
             <a:r>
-              <a:rPr lang="en-US" sz="3800" b="false" i="false" u="none" strike="noStrike">
-                <a:solidFill>
-                  <a:srgbClr val="715130"/>
-                </a:solidFill>
-                <a:latin typeface="Pretendard Bold"/>
-              </a:rPr>
-              <a:t>(2</a:t>
-            </a:r>
-            <a:r>
-              <a:rPr lang="ko-KR" sz="3800" b="false" i="false" u="none" strike="noStrike">
+              <a:rPr lang="en-US" sz="3800" b="0" i="0" u="none" strike="noStrike">
+                <a:solidFill>
+                  <a:srgbClr val="715130"/>
+                </a:solidFill>
+                <a:latin typeface="Pretendard Bold"/>
+              </a:rPr>
+              <a:t>(</a:t>
+            </a:r>
+            <a:r>
+              <a:rPr lang="en-US" altLang="ko-KR" sz="3800" b="0" i="0" u="none" strike="noStrike">
+                <a:solidFill>
+                  <a:srgbClr val="715130"/>
+                </a:solidFill>
+                <a:latin typeface="Pretendard Bold"/>
+              </a:rPr>
+              <a:t>1</a:t>
+            </a:r>
+            <a:r>
+              <a:rPr lang="ko-KR" sz="3800" b="0" i="0" u="none" strike="noStrike">
                 <a:solidFill>
                   <a:srgbClr val="715130"/>
                 </a:solidFill>
@@ -10638,16 +10662,16 @@
               <a:t>명</a:t>
             </a:r>
             <a:r>
-              <a:rPr lang="en-US" sz="3800" b="false" i="false" u="none" strike="noStrike">
-                <a:solidFill>
-                  <a:srgbClr val="715130"/>
-                </a:solidFill>
-                <a:latin typeface="Pretendard Bold"/>
-              </a:rPr>
-              <a:t> </a:t>
-            </a:r>
-            <a:r>
-              <a:rPr lang="ko-KR" sz="3800" b="false" i="false" u="none" strike="noStrike">
+              <a:rPr lang="en-US" sz="3800" b="0" i="0" u="none" strike="noStrike">
+                <a:solidFill>
+                  <a:srgbClr val="715130"/>
+                </a:solidFill>
+                <a:latin typeface="Pretendard Bold"/>
+              </a:rPr>
+              <a:t> </a:t>
+            </a:r>
+            <a:r>
+              <a:rPr lang="ko-KR" sz="3800" b="0" i="0" u="none" strike="noStrike">
                 <a:solidFill>
                   <a:srgbClr val="715130"/>
                 </a:solidFill>
@@ -10656,7 +10680,7 @@
               <a:t>기준</a:t>
             </a:r>
             <a:r>
-              <a:rPr lang="en-US" sz="3800" b="false" i="false" u="none" strike="noStrike">
+              <a:rPr lang="en-US" sz="3800" b="0" i="0" u="none" strike="noStrike">
                 <a:solidFill>
                   <a:srgbClr val="715130"/>
                 </a:solidFill>
@@ -10664,15 +10688,22 @@
               </a:rPr>
               <a:t>)</a:t>
             </a:r>
-          </a:p>
-          <a:p>
-            <a:pPr algn="l" lvl="0">
+            <a:endParaRPr lang="en-US" sz="3800" b="0" i="0" u="none" strike="noStrike">
+              <a:solidFill>
+                <a:srgbClr val="715130"/>
+              </a:solidFill>
+              <a:latin typeface="Pretendard Bold"/>
+            </a:endParaRPr>
+          </a:p>
+          <a:p>
+            <a:pPr lvl="0" algn="l">
               <a:lnSpc>
-                <a:spcPct val="128650"/>
+                <a:spcPct val="128649"/>
               </a:lnSpc>
+              <a:defRPr/>
             </a:pPr>
             <a:r>
-              <a:rPr lang="en-US" sz="3800" b="false" i="false" u="none" strike="noStrike">
+              <a:rPr lang="en-US" sz="3800" b="0" i="0" u="none" strike="noStrike">
                 <a:solidFill>
                   <a:srgbClr val="715130"/>
                 </a:solidFill>
@@ -10681,7 +10712,7 @@
               <a:t>※ </a:t>
             </a:r>
             <a:r>
-              <a:rPr lang="ko-KR" sz="3800" b="false" i="false" u="none" strike="noStrike">
+              <a:rPr lang="ko-KR" sz="3800" b="0" i="0" u="none" strike="noStrike">
                 <a:solidFill>
                   <a:srgbClr val="715130"/>
                 </a:solidFill>
@@ -10690,7 +10721,7 @@
               <a:t>평생학습원</a:t>
             </a:r>
             <a:r>
-              <a:rPr lang="en-US" sz="3800" b="false" i="false" u="none" strike="noStrike">
+              <a:rPr lang="en-US" sz="3800" b="0" i="0" u="none" strike="noStrike">
                 <a:solidFill>
                   <a:srgbClr val="715130"/>
                 </a:solidFill>
@@ -10699,7 +10730,7 @@
               <a:t>·</a:t>
             </a:r>
             <a:r>
-              <a:rPr lang="ko-KR" sz="3800" b="false" i="false" u="none" strike="noStrike">
+              <a:rPr lang="ko-KR" sz="3800" b="0" i="0" u="none" strike="noStrike">
                 <a:solidFill>
                   <a:srgbClr val="715130"/>
                 </a:solidFill>
@@ -10708,16 +10739,16 @@
               <a:t>청소년수련관</a:t>
             </a:r>
             <a:r>
-              <a:rPr lang="en-US" sz="3800" b="false" i="false" u="none" strike="noStrike">
-                <a:solidFill>
-                  <a:srgbClr val="715130"/>
-                </a:solidFill>
-                <a:latin typeface="Pretendard Bold"/>
-              </a:rPr>
-              <a:t> </a:t>
-            </a:r>
-            <a:r>
-              <a:rPr lang="ko-KR" sz="3800" b="false" i="false" u="none" strike="noStrike">
+              <a:rPr lang="en-US" sz="3800" b="0" i="0" u="none" strike="noStrike">
+                <a:solidFill>
+                  <a:srgbClr val="715130"/>
+                </a:solidFill>
+                <a:latin typeface="Pretendard Bold"/>
+              </a:rPr>
+              <a:t> </a:t>
+            </a:r>
+            <a:r>
+              <a:rPr lang="ko-KR" sz="3800" b="0" i="0" u="none" strike="noStrike">
                 <a:solidFill>
                   <a:srgbClr val="715130"/>
                 </a:solidFill>
@@ -10726,16 +10757,16 @@
               <a:t>등</a:t>
             </a:r>
             <a:r>
-              <a:rPr lang="en-US" sz="3800" b="false" i="false" u="none" strike="noStrike">
-                <a:solidFill>
-                  <a:srgbClr val="715130"/>
-                </a:solidFill>
-                <a:latin typeface="Pretendard Bold"/>
-              </a:rPr>
-              <a:t> </a:t>
-            </a:r>
-            <a:r>
-              <a:rPr lang="ko-KR" sz="3800" b="false" i="false" u="none" strike="noStrike">
+              <a:rPr lang="en-US" sz="3800" b="0" i="0" u="none" strike="noStrike">
+                <a:solidFill>
+                  <a:srgbClr val="715130"/>
+                </a:solidFill>
+                <a:latin typeface="Pretendard Bold"/>
+              </a:rPr>
+              <a:t> </a:t>
+            </a:r>
+            <a:r>
+              <a:rPr lang="ko-KR" sz="3800" b="0" i="0" u="none" strike="noStrike">
                 <a:solidFill>
                   <a:srgbClr val="715130"/>
                 </a:solidFill>
@@ -10744,16 +10775,16 @@
               <a:t>시</a:t>
             </a:r>
             <a:r>
-              <a:rPr lang="en-US" sz="3800" b="false" i="false" u="none" strike="noStrike">
-                <a:solidFill>
-                  <a:srgbClr val="715130"/>
-                </a:solidFill>
-                <a:latin typeface="Pretendard Bold"/>
-              </a:rPr>
-              <a:t> </a:t>
-            </a:r>
-            <a:r>
-              <a:rPr lang="ko-KR" sz="3800" b="false" i="false" u="none" strike="noStrike">
+              <a:rPr lang="en-US" sz="3800" b="0" i="0" u="none" strike="noStrike">
+                <a:solidFill>
+                  <a:srgbClr val="715130"/>
+                </a:solidFill>
+                <a:latin typeface="Pretendard Bold"/>
+              </a:rPr>
+              <a:t> </a:t>
+            </a:r>
+            <a:r>
+              <a:rPr lang="ko-KR" sz="3800" b="0" i="0" u="none" strike="noStrike">
                 <a:solidFill>
                   <a:srgbClr val="715130"/>
                 </a:solidFill>
@@ -10762,16 +10793,16 @@
               <a:t>산하기관</a:t>
             </a:r>
             <a:r>
-              <a:rPr lang="en-US" sz="3800" b="false" i="false" u="none" strike="noStrike">
-                <a:solidFill>
-                  <a:srgbClr val="715130"/>
-                </a:solidFill>
-                <a:latin typeface="Pretendard Bold"/>
-              </a:rPr>
-              <a:t> </a:t>
-            </a:r>
-            <a:r>
-              <a:rPr lang="ko-KR" sz="3800" b="false" i="false" u="none" strike="noStrike">
+              <a:rPr lang="en-US" sz="3800" b="0" i="0" u="none" strike="noStrike">
+                <a:solidFill>
+                  <a:srgbClr val="715130"/>
+                </a:solidFill>
+                <a:latin typeface="Pretendard Bold"/>
+              </a:rPr>
+              <a:t> </a:t>
+            </a:r>
+            <a:r>
+              <a:rPr lang="ko-KR" sz="3800" b="0" i="0" u="none" strike="noStrike">
                 <a:solidFill>
                   <a:srgbClr val="715130"/>
                 </a:solidFill>
@@ -10780,16 +10811,16 @@
               <a:t>연계</a:t>
             </a:r>
             <a:r>
-              <a:rPr lang="en-US" sz="3800" b="false" i="false" u="none" strike="noStrike">
-                <a:solidFill>
-                  <a:srgbClr val="715130"/>
-                </a:solidFill>
-                <a:latin typeface="Pretendard Bold"/>
-              </a:rPr>
-              <a:t> </a:t>
-            </a:r>
-            <a:r>
-              <a:rPr lang="ko-KR" sz="3800" b="false" i="false" u="none" strike="noStrike">
+              <a:rPr lang="en-US" sz="3800" b="0" i="0" u="none" strike="noStrike">
+                <a:solidFill>
+                  <a:srgbClr val="715130"/>
+                </a:solidFill>
+                <a:latin typeface="Pretendard Bold"/>
+              </a:rPr>
+              <a:t> </a:t>
+            </a:r>
+            <a:r>
+              <a:rPr lang="ko-KR" sz="3800" b="0" i="0" u="none" strike="noStrike">
                 <a:solidFill>
                   <a:srgbClr val="715130"/>
                 </a:solidFill>
@@ -10797,6 +10828,12 @@
               </a:rPr>
               <a:t>가능</a:t>
             </a:r>
+            <a:endParaRPr lang="ko-KR" sz="3800" b="0" i="0" u="none" strike="noStrike">
+              <a:solidFill>
+                <a:srgbClr val="715130"/>
+              </a:solidFill>
+              <a:ea typeface="Pretendard Bold"/>
+            </a:endParaRPr>
           </a:p>
         </p:txBody>
       </p:sp>
@@ -16192,12 +16229,12 @@
 </file>
 
 <file path=ppt/slides/slide4.xml><?xml version="1.0" encoding="utf-8"?>
-<p:sld xmlns:p="http://schemas.openxmlformats.org/presentationml/2006/main" xmlns:a="http://schemas.openxmlformats.org/drawingml/2006/main" xmlns:r="http://schemas.openxmlformats.org/officeDocument/2006/relationships">
+<p:sld xmlns:r="http://schemas.openxmlformats.org/officeDocument/2006/relationships" xmlns:c="http://schemas.openxmlformats.org/drawingml/2006/chart" xmlns:a="http://schemas.openxmlformats.org/drawingml/2006/main" xmlns:dgm="http://schemas.openxmlformats.org/drawingml/2006/diagram" xmlns:dsp="http://schemas.microsoft.com/office/drawing/2008/diagram" xmlns:p="http://schemas.openxmlformats.org/presentationml/2006/main">
   <p:cSld>
     <p:bg>
-      <p:bgPr>
+      <p:bgPr shadeToTitle="0">
         <a:solidFill>
-          <a:srgbClr val="EFEBE7"/>
+          <a:srgbClr val="efebe7"/>
         </a:solidFill>
       </p:bgPr>
     </p:bg>
@@ -16272,7 +16309,7 @@
           <p:nvPr/>
         </p:nvPicPr>
         <p:blipFill>
-          <a:blip r:embed="rId3"/>
+          <a:blip r:embed="rId4"/>
           <a:stretch>
             <a:fillRect/>
           </a:stretch>
@@ -16296,7 +16333,7 @@
           <p:nvPr/>
         </p:nvPicPr>
         <p:blipFill>
-          <a:blip r:embed="rId4"/>
+          <a:blip r:embed="rId5"/>
           <a:stretch>
             <a:fillRect/>
           </a:stretch>
@@ -16320,7 +16357,7 @@
           <p:nvPr/>
         </p:nvPicPr>
         <p:blipFill>
-          <a:blip r:embed="rId5"/>
+          <a:blip r:embed="rId6"/>
           <a:stretch>
             <a:fillRect/>
           </a:stretch>
@@ -16400,12 +16437,12 @@
       </p:sp>
       <p:sp>
         <p:nvSpPr>
-          <p:cNvPr name="TextBox 8" id="8"/>
-          <p:cNvSpPr txBox="true"/>
+          <p:cNvPr id="8" name="TextBox 8"/>
+          <p:cNvSpPr txBox="1"/>
           <p:nvPr/>
         </p:nvSpPr>
         <p:spPr>
-          <a:xfrm rot="0">
+          <a:xfrm>
             <a:off x="2006600" y="1778000"/>
             <a:ext cx="14262100" cy="7518400"/>
           </a:xfrm>
@@ -16414,25 +16451,26 @@
           </a:prstGeom>
         </p:spPr>
         <p:txBody>
-          <a:bodyPr anchor="t" rtlCol="false" lIns="0" tIns="0" rIns="0" bIns="0"/>
+          <a:bodyPr lIns="0" tIns="0" rIns="0" bIns="0" anchor="t"/>
           <a:lstStyle/>
           <a:p>
-            <a:pPr algn="ctr" lvl="0">
+            <a:pPr lvl="0" algn="ctr">
               <a:lnSpc>
                 <a:spcPct val="116199"/>
               </a:lnSpc>
+              <a:defRPr/>
             </a:pPr>
             <a:r>
-              <a:rPr lang="ko-KR" sz="5300" b="false" i="false" u="none" strike="noStrike">
+              <a:rPr lang="ko-KR" altLang="en-US" sz="5300" b="0" i="0" u="none" strike="noStrike">
                 <a:solidFill>
                   <a:srgbClr val="000000"/>
                 </a:solidFill>
                 <a:ea typeface="esamanru OTF Medium"/>
               </a:rPr>
-              <a:t>이름</a:t>
-            </a:r>
-            <a:r>
-              <a:rPr lang="en-US" sz="5300" b="false" i="false" u="none" strike="noStrike">
+              <a:t>상호명</a:t>
+            </a:r>
+            <a:r>
+              <a:rPr lang="en-US" sz="5300" b="0" i="0" u="none" strike="noStrike">
                 <a:solidFill>
                   <a:srgbClr val="000000"/>
                 </a:solidFill>
@@ -16441,7 +16479,7 @@
               <a:t>: </a:t>
             </a:r>
             <a:r>
-              <a:rPr lang="ko-KR" sz="5300" b="false" i="false" u="none" strike="noStrike">
+              <a:rPr lang="ko-KR" sz="5300" b="0" i="0" u="none" strike="noStrike">
                 <a:solidFill>
                   <a:srgbClr val="000000"/>
                 </a:solidFill>
@@ -16449,31 +16487,37 @@
               </a:rPr>
               <a:t>우스레공방</a:t>
             </a:r>
-          </a:p>
-          <a:p>
-            <a:pPr algn="ctr" lvl="0">
+            <a:endParaRPr lang="ko-KR" sz="5300" b="0" i="0" u="none" strike="noStrike">
+              <a:solidFill>
+                <a:srgbClr val="000000"/>
+              </a:solidFill>
+              <a:ea typeface="esamanru OTF Medium"/>
+            </a:endParaRPr>
+          </a:p>
+          <a:p>
+            <a:pPr lvl="0" algn="ctr">
               <a:lnSpc>
                 <a:spcPct val="116199"/>
               </a:lnSpc>
+              <a:defRPr/>
             </a:pPr>
-            <a:r>
-              <a:rPr lang="en-US" sz="5300" b="false" i="false" u="none" strike="noStrike">
-                <a:solidFill>
-                  <a:srgbClr val="000000"/>
-                </a:solidFill>
-                <a:latin typeface="esamanru OTF Medium"/>
-              </a:rPr>
-              <a:t/>
-            </a:r>
-          </a:p>
-          <a:p>
-            <a:pPr algn="ctr" lvl="0">
+            <a:endParaRPr lang="en-US" sz="5300" b="0" i="0" u="none" strike="noStrike">
+              <a:solidFill>
+                <a:srgbClr val="000000"/>
+              </a:solidFill>
+              <a:latin typeface="esamanru OTF Medium"/>
+              <a:ea typeface="esamanru OTF Medium"/>
+            </a:endParaRPr>
+          </a:p>
+          <a:p>
+            <a:pPr lvl="0" algn="ctr">
               <a:lnSpc>
                 <a:spcPct val="116199"/>
               </a:lnSpc>
+              <a:defRPr/>
             </a:pPr>
             <a:r>
-              <a:rPr lang="ko-KR" sz="5300" b="false" i="false" u="none" strike="noStrike">
+              <a:rPr lang="ko-KR" sz="5300" b="0" i="0" u="none" strike="noStrike">
                 <a:solidFill>
                   <a:srgbClr val="000000"/>
                 </a:solidFill>
@@ -16482,7 +16526,7 @@
               <a:t>위치</a:t>
             </a:r>
             <a:r>
-              <a:rPr lang="en-US" sz="5300" b="false" i="false" u="none" strike="noStrike">
+              <a:rPr lang="en-US" sz="5300" b="0" i="0" u="none" strike="noStrike">
                 <a:solidFill>
                   <a:srgbClr val="000000"/>
                 </a:solidFill>
@@ -16491,7 +16535,7 @@
               <a:t>: </a:t>
             </a:r>
             <a:r>
-              <a:rPr lang="ko-KR" sz="5300" b="false" i="false" u="none" strike="noStrike">
+              <a:rPr lang="ko-KR" sz="5300" b="0" i="0" u="none" strike="noStrike">
                 <a:solidFill>
                   <a:srgbClr val="000000"/>
                 </a:solidFill>
@@ -16500,7 +16544,7 @@
               <a:t>의정부시</a:t>
             </a:r>
             <a:r>
-              <a:rPr lang="en-US" sz="5300" b="false" i="false" u="none" strike="noStrike">
+              <a:rPr lang="en-US" sz="5300" b="0" i="0" u="none" strike="noStrike">
                 <a:solidFill>
                   <a:srgbClr val="000000"/>
                 </a:solidFill>
@@ -16509,7 +16553,7 @@
               <a:t> </a:t>
             </a:r>
             <a:r>
-              <a:rPr lang="ko-KR" sz="5300" b="false" i="false" u="none" strike="noStrike">
+              <a:rPr lang="ko-KR" sz="5300" b="0" i="0" u="none" strike="noStrike">
                 <a:solidFill>
                   <a:srgbClr val="000000"/>
                 </a:solidFill>
@@ -16518,7 +16562,7 @@
               <a:t>동일로</a:t>
             </a:r>
             <a:r>
-              <a:rPr lang="en-US" sz="5300" b="false" i="false" u="none" strike="noStrike">
+              <a:rPr lang="en-US" sz="5300" b="0" i="0" u="none" strike="noStrike">
                 <a:solidFill>
                   <a:srgbClr val="000000"/>
                 </a:solidFill>
@@ -16527,7 +16571,7 @@
               <a:t> 513</a:t>
             </a:r>
             <a:r>
-              <a:rPr lang="ko-KR" sz="5300" b="false" i="false" u="none" strike="noStrike">
+              <a:rPr lang="ko-KR" sz="5300" b="0" i="0" u="none" strike="noStrike">
                 <a:solidFill>
                   <a:srgbClr val="000000"/>
                 </a:solidFill>
@@ -16536,7 +16580,7 @@
               <a:t>번길</a:t>
             </a:r>
             <a:r>
-              <a:rPr lang="en-US" sz="5300" b="false" i="false" u="none" strike="noStrike">
+              <a:rPr lang="en-US" sz="5300" b="0" i="0" u="none" strike="noStrike">
                 <a:solidFill>
                   <a:srgbClr val="000000"/>
                 </a:solidFill>
@@ -16544,31 +16588,36 @@
               </a:rPr>
               <a:t> 7</a:t>
             </a:r>
-          </a:p>
-          <a:p>
-            <a:pPr algn="ctr" lvl="0">
+            <a:endParaRPr lang="en-US" sz="5300" b="0" i="0" u="none" strike="noStrike">
+              <a:solidFill>
+                <a:srgbClr val="000000"/>
+              </a:solidFill>
+              <a:latin typeface="esamanru OTF Medium"/>
+            </a:endParaRPr>
+          </a:p>
+          <a:p>
+            <a:pPr lvl="0" algn="ctr">
               <a:lnSpc>
                 <a:spcPct val="116199"/>
               </a:lnSpc>
+              <a:defRPr/>
             </a:pPr>
-            <a:r>
-              <a:rPr lang="en-US" sz="5300" b="false" i="false" u="none" strike="noStrike">
-                <a:solidFill>
-                  <a:srgbClr val="000000"/>
-                </a:solidFill>
-                <a:latin typeface="esamanru OTF Medium"/>
-              </a:rPr>
-              <a:t/>
-            </a:r>
-          </a:p>
-          <a:p>
-            <a:pPr algn="ctr" lvl="0">
+            <a:endParaRPr lang="en-US" sz="5300" b="0" i="0" u="none" strike="noStrike">
+              <a:solidFill>
+                <a:srgbClr val="000000"/>
+              </a:solidFill>
+              <a:latin typeface="esamanru OTF Medium"/>
+            </a:endParaRPr>
+          </a:p>
+          <a:p>
+            <a:pPr lvl="0" algn="ctr">
               <a:lnSpc>
                 <a:spcPct val="116199"/>
               </a:lnSpc>
+              <a:defRPr/>
             </a:pPr>
             <a:r>
-              <a:rPr lang="ko-KR" sz="5300" b="false" i="false" u="none" strike="noStrike">
+              <a:rPr lang="ko-KR" sz="5300" b="0" i="0" u="none" strike="noStrike">
                 <a:solidFill>
                   <a:srgbClr val="000000"/>
                 </a:solidFill>
@@ -16577,7 +16626,7 @@
               <a:t>연락처</a:t>
             </a:r>
             <a:r>
-              <a:rPr lang="en-US" sz="5300" b="false" i="false" u="none" strike="noStrike">
+              <a:rPr lang="en-US" sz="5300" b="0" i="0" u="none" strike="noStrike">
                 <a:solidFill>
                   <a:srgbClr val="000000"/>
                 </a:solidFill>
@@ -16585,31 +16634,36 @@
               </a:rPr>
               <a:t>: 010-5539-7868 / pcm9651@naver.com</a:t>
             </a:r>
-          </a:p>
-          <a:p>
-            <a:pPr algn="ctr" lvl="0">
+            <a:endParaRPr lang="en-US" sz="5300" b="0" i="0" u="none" strike="noStrike">
+              <a:solidFill>
+                <a:srgbClr val="000000"/>
+              </a:solidFill>
+              <a:latin typeface="esamanru OTF Medium"/>
+            </a:endParaRPr>
+          </a:p>
+          <a:p>
+            <a:pPr lvl="0" algn="ctr">
               <a:lnSpc>
                 <a:spcPct val="116199"/>
               </a:lnSpc>
+              <a:defRPr/>
             </a:pPr>
-            <a:r>
-              <a:rPr lang="en-US" sz="5300" b="false" i="false" u="none" strike="noStrike">
-                <a:solidFill>
-                  <a:srgbClr val="000000"/>
-                </a:solidFill>
-                <a:latin typeface="esamanru OTF Medium"/>
-              </a:rPr>
-              <a:t/>
-            </a:r>
-          </a:p>
-          <a:p>
-            <a:pPr algn="ctr" lvl="0">
+            <a:endParaRPr lang="en-US" sz="5300" b="0" i="0" u="none" strike="noStrike">
+              <a:solidFill>
+                <a:srgbClr val="000000"/>
+              </a:solidFill>
+              <a:latin typeface="esamanru OTF Medium"/>
+            </a:endParaRPr>
+          </a:p>
+          <a:p>
+            <a:pPr lvl="0" algn="ctr">
               <a:lnSpc>
                 <a:spcPct val="116199"/>
               </a:lnSpc>
+              <a:defRPr/>
             </a:pPr>
             <a:r>
-              <a:rPr lang="ko-KR" sz="5300" b="false" i="false" u="none" strike="noStrike">
+              <a:rPr lang="ko-KR" sz="5300" b="0" i="0" u="none" strike="noStrike">
                 <a:solidFill>
                   <a:srgbClr val="000000"/>
                 </a:solidFill>
@@ -16618,7 +16672,7 @@
               <a:t>운영</a:t>
             </a:r>
             <a:r>
-              <a:rPr lang="en-US" sz="5300" b="false" i="false" u="none" strike="noStrike">
+              <a:rPr lang="en-US" sz="5300" b="0" i="0" u="none" strike="noStrike">
                 <a:solidFill>
                   <a:srgbClr val="000000"/>
                 </a:solidFill>
@@ -16627,7 +16681,7 @@
               <a:t> </a:t>
             </a:r>
             <a:r>
-              <a:rPr lang="ko-KR" sz="5300" b="false" i="false" u="none" strike="noStrike">
+              <a:rPr lang="ko-KR" sz="5300" b="0" i="0" u="none" strike="noStrike">
                 <a:solidFill>
                   <a:srgbClr val="000000"/>
                 </a:solidFill>
@@ -16636,7 +16690,7 @@
               <a:t>형태</a:t>
             </a:r>
             <a:r>
-              <a:rPr lang="en-US" sz="5300" b="false" i="false" u="none" strike="noStrike">
+              <a:rPr lang="en-US" sz="5300" b="0" i="0" u="none" strike="noStrike">
                 <a:solidFill>
                   <a:srgbClr val="000000"/>
                 </a:solidFill>
@@ -16645,7 +16699,7 @@
               <a:t>: </a:t>
             </a:r>
             <a:r>
-              <a:rPr lang="ko-KR" sz="5300" b="false" i="false" u="none" strike="noStrike">
+              <a:rPr lang="ko-KR" sz="5300" b="0" i="0" u="none" strike="noStrike">
                 <a:solidFill>
                   <a:srgbClr val="000000"/>
                 </a:solidFill>
@@ -16654,7 +16708,7 @@
               <a:t>목공</a:t>
             </a:r>
             <a:r>
-              <a:rPr lang="en-US" sz="5300" b="false" i="false" u="none" strike="noStrike">
+              <a:rPr lang="en-US" sz="5300" b="0" i="0" u="none" strike="noStrike">
                 <a:solidFill>
                   <a:srgbClr val="000000"/>
                 </a:solidFill>
@@ -16663,7 +16717,7 @@
               <a:t> </a:t>
             </a:r>
             <a:r>
-              <a:rPr lang="ko-KR" sz="5300" b="false" i="false" u="none" strike="noStrike">
+              <a:rPr lang="ko-KR" sz="5300" b="0" i="0" u="none" strike="noStrike">
                 <a:solidFill>
                   <a:srgbClr val="000000"/>
                 </a:solidFill>
@@ -16672,7 +16726,7 @@
               <a:t>체험</a:t>
             </a:r>
             <a:r>
-              <a:rPr lang="en-US" sz="5300" b="false" i="false" u="none" strike="noStrike">
+              <a:rPr lang="en-US" sz="5300" b="0" i="0" u="none" strike="noStrike">
                 <a:solidFill>
                   <a:srgbClr val="000000"/>
                 </a:solidFill>
@@ -16681,7 +16735,7 @@
               <a:t> </a:t>
             </a:r>
             <a:r>
-              <a:rPr lang="ko-KR" sz="5300" b="false" i="false" u="none" strike="noStrike">
+              <a:rPr lang="ko-KR" sz="5300" b="0" i="0" u="none" strike="noStrike">
                 <a:solidFill>
                   <a:srgbClr val="000000"/>
                 </a:solidFill>
@@ -16690,7 +16744,7 @@
               <a:t>및</a:t>
             </a:r>
             <a:r>
-              <a:rPr lang="en-US" sz="5300" b="false" i="false" u="none" strike="noStrike">
+              <a:rPr lang="en-US" sz="5300" b="0" i="0" u="none" strike="noStrike">
                 <a:solidFill>
                   <a:srgbClr val="000000"/>
                 </a:solidFill>
@@ -16699,7 +16753,7 @@
               <a:t> </a:t>
             </a:r>
             <a:r>
-              <a:rPr lang="ko-KR" sz="5300" b="false" i="false" u="none" strike="noStrike">
+              <a:rPr lang="ko-KR" sz="5300" b="0" i="0" u="none" strike="noStrike">
                 <a:solidFill>
                   <a:srgbClr val="000000"/>
                 </a:solidFill>
@@ -16708,7 +16762,7 @@
               <a:t>교육</a:t>
             </a:r>
             <a:r>
-              <a:rPr lang="en-US" sz="5300" b="false" i="false" u="none" strike="noStrike">
+              <a:rPr lang="en-US" sz="5300" b="0" i="0" u="none" strike="noStrike">
                 <a:solidFill>
                   <a:srgbClr val="000000"/>
                 </a:solidFill>
@@ -16717,7 +16771,7 @@
               <a:t> </a:t>
             </a:r>
             <a:r>
-              <a:rPr lang="ko-KR" sz="5300" b="false" i="false" u="none" strike="noStrike">
+              <a:rPr lang="ko-KR" sz="5300" b="0" i="0" u="none" strike="noStrike">
                 <a:solidFill>
                   <a:srgbClr val="000000"/>
                 </a:solidFill>
@@ -16726,7 +16780,7 @@
               <a:t>전문</a:t>
             </a:r>
             <a:r>
-              <a:rPr lang="en-US" sz="5300" b="false" i="false" u="none" strike="noStrike">
+              <a:rPr lang="en-US" sz="5300" b="0" i="0" u="none" strike="noStrike">
                 <a:solidFill>
                   <a:srgbClr val="000000"/>
                 </a:solidFill>
@@ -16735,7 +16789,7 @@
               <a:t> </a:t>
             </a:r>
             <a:r>
-              <a:rPr lang="ko-KR" sz="5300" b="false" i="false" u="none" strike="noStrike">
+              <a:rPr lang="ko-KR" sz="5300" b="0" i="0" u="none" strike="noStrike">
                 <a:solidFill>
                   <a:srgbClr val="000000"/>
                 </a:solidFill>
@@ -16743,6 +16797,12 @@
               </a:rPr>
               <a:t>공방</a:t>
             </a:r>
+            <a:endParaRPr lang="ko-KR" sz="5300" b="0" i="0" u="none" strike="noStrike">
+              <a:solidFill>
+                <a:srgbClr val="000000"/>
+              </a:solidFill>
+              <a:ea typeface="esamanru OTF Medium"/>
+            </a:endParaRPr>
           </a:p>
         </p:txBody>
       </p:sp>
@@ -16755,12 +16815,12 @@
 </file>
 
 <file path=ppt/slides/slide5.xml><?xml version="1.0" encoding="utf-8"?>
-<p:sld xmlns:p="http://schemas.openxmlformats.org/presentationml/2006/main" xmlns:a="http://schemas.openxmlformats.org/drawingml/2006/main" xmlns:r="http://schemas.openxmlformats.org/officeDocument/2006/relationships">
+<p:sld xmlns:r="http://schemas.openxmlformats.org/officeDocument/2006/relationships" xmlns:c="http://schemas.openxmlformats.org/drawingml/2006/chart" xmlns:a="http://schemas.openxmlformats.org/drawingml/2006/main" xmlns:dgm="http://schemas.openxmlformats.org/drawingml/2006/diagram" xmlns:dsp="http://schemas.microsoft.com/office/drawing/2008/diagram" xmlns:p="http://schemas.openxmlformats.org/presentationml/2006/main">
   <p:cSld>
     <p:bg>
-      <p:bgPr>
+      <p:bgPr shadeToTitle="0">
         <a:solidFill>
-          <a:srgbClr val="EFEBE7"/>
+          <a:srgbClr val="efebe7"/>
         </a:solidFill>
       </p:bgPr>
     </p:bg>
@@ -16835,7 +16895,7 @@
           <p:nvPr/>
         </p:nvPicPr>
         <p:blipFill>
-          <a:blip r:embed="rId3"/>
+          <a:blip r:embed="rId4"/>
           <a:stretch>
             <a:fillRect/>
           </a:stretch>
@@ -16859,7 +16919,7 @@
           <p:nvPr/>
         </p:nvPicPr>
         <p:blipFill>
-          <a:blip r:embed="rId4"/>
+          <a:blip r:embed="rId5"/>
           <a:stretch>
             <a:fillRect/>
           </a:stretch>
@@ -16883,7 +16943,7 @@
           <p:nvPr/>
         </p:nvPicPr>
         <p:blipFill>
-          <a:blip r:embed="rId5"/>
+          <a:blip r:embed="rId6"/>
           <a:stretch>
             <a:fillRect/>
           </a:stretch>
@@ -16961,7 +17021,7 @@
           <p:nvPr/>
         </p:nvPicPr>
         <p:blipFill>
-          <a:blip r:embed="rId6">
+          <a:blip r:embed="rId7">
             <a:alphaModFix amt="45000"/>
           </a:blip>
           <a:stretch>
@@ -17095,7 +17155,7 @@
           <p:nvPr/>
         </p:nvPicPr>
         <p:blipFill>
-          <a:blip r:embed="rId7"/>
+          <a:blip r:embed="rId8"/>
           <a:stretch>
             <a:fillRect/>
           </a:stretch>
@@ -17119,7 +17179,7 @@
           <p:nvPr/>
         </p:nvPicPr>
         <p:blipFill>
-          <a:blip r:embed="rId8">
+          <a:blip r:embed="rId9">
             <a:alphaModFix amt="7000"/>
           </a:blip>
           <a:stretch>
@@ -17271,7 +17331,7 @@
           <p:nvPr/>
         </p:nvPicPr>
         <p:blipFill>
-          <a:blip r:embed="rId6">
+          <a:blip r:embed="rId10">
             <a:alphaModFix amt="45000"/>
           </a:blip>
           <a:stretch>
@@ -17290,12 +17350,12 @@
       </p:pic>
       <p:sp>
         <p:nvSpPr>
-          <p:cNvPr name="TextBox 14" id="14"/>
-          <p:cNvSpPr txBox="true"/>
+          <p:cNvPr id="14" name="TextBox 14"/>
+          <p:cNvSpPr txBox="1"/>
           <p:nvPr/>
         </p:nvSpPr>
         <p:spPr>
-          <a:xfrm rot="0">
+          <a:xfrm>
             <a:off x="1384300" y="6134100"/>
             <a:ext cx="2324100" cy="863600"/>
           </a:xfrm>
@@ -17304,16 +17364,17 @@
           </a:prstGeom>
         </p:spPr>
         <p:txBody>
-          <a:bodyPr anchor="ctr" rtlCol="false" lIns="0" tIns="0" rIns="0" bIns="0"/>
+          <a:bodyPr lIns="0" tIns="0" rIns="0" bIns="0" anchor="ctr"/>
           <a:lstStyle/>
           <a:p>
-            <a:pPr algn="ctr" lvl="0">
+            <a:pPr lvl="0" algn="ctr">
               <a:lnSpc>
                 <a:spcPct val="116199"/>
               </a:lnSpc>
+              <a:defRPr/>
             </a:pPr>
             <a:r>
-              <a:rPr lang="en-US" sz="2400" b="false" i="false" u="none" strike="noStrike">
+              <a:rPr lang="en-US" sz="2400" b="0" i="0" u="none" strike="noStrike">
                 <a:solidFill>
                   <a:srgbClr val="000000"/>
                 </a:solidFill>
@@ -17322,7 +17383,7 @@
               <a:t>ESG·</a:t>
             </a:r>
             <a:r>
-              <a:rPr lang="ko-KR" sz="2400" b="false" i="false" u="none" strike="noStrike">
+              <a:rPr lang="ko-KR" sz="2400" b="0" i="0" u="none" strike="noStrike">
                 <a:solidFill>
                   <a:srgbClr val="000000"/>
                 </a:solidFill>
@@ -17331,7 +17392,7 @@
               <a:t>탄소중립</a:t>
             </a:r>
             <a:r>
-              <a:rPr lang="en-US" sz="2400" b="false" i="false" u="none" strike="noStrike">
+              <a:rPr lang="en-US" sz="2400" b="0" i="0" u="none" strike="noStrike">
                 <a:solidFill>
                   <a:srgbClr val="000000"/>
                 </a:solidFill>
@@ -17339,8 +17400,22 @@
               </a:rPr>
               <a:t> </a:t>
             </a:r>
-            <a:r>
-              <a:rPr lang="ko-KR" sz="2400" b="false" i="false" u="none" strike="noStrike">
+            <a:endParaRPr lang="ko-KR" sz="2400" b="0" i="0" u="none" strike="noStrike">
+              <a:solidFill>
+                <a:srgbClr val="000000"/>
+              </a:solidFill>
+              <a:ea typeface="esamanru OTF Bold"/>
+            </a:endParaRPr>
+          </a:p>
+          <a:p>
+            <a:pPr lvl="0" algn="ctr">
+              <a:lnSpc>
+                <a:spcPct val="116199"/>
+              </a:lnSpc>
+              <a:defRPr/>
+            </a:pPr>
+            <a:r>
+              <a:rPr lang="ko-KR" sz="2400" b="0" i="0" u="none" strike="noStrike">
                 <a:solidFill>
                   <a:srgbClr val="000000"/>
                 </a:solidFill>
@@ -17349,7 +17424,7 @@
               <a:t>교육</a:t>
             </a:r>
             <a:r>
-              <a:rPr lang="en-US" sz="2400" b="false" i="false" u="none" strike="noStrike">
+              <a:rPr lang="en-US" sz="2400" b="0" i="0" u="none" strike="noStrike">
                 <a:solidFill>
                   <a:srgbClr val="000000"/>
                 </a:solidFill>
@@ -17358,7 +17433,7 @@
               <a:t> </a:t>
             </a:r>
             <a:r>
-              <a:rPr lang="ko-KR" sz="2400" b="false" i="false" u="none" strike="noStrike">
+              <a:rPr lang="ko-KR" sz="2400" b="0" i="0" u="none" strike="noStrike">
                 <a:solidFill>
                   <a:srgbClr val="000000"/>
                 </a:solidFill>
@@ -17366,6 +17441,12 @@
               </a:rPr>
               <a:t>연계</a:t>
             </a:r>
+            <a:endParaRPr lang="ko-KR" sz="2400" b="0" i="0" u="none" strike="noStrike">
+              <a:solidFill>
+                <a:srgbClr val="000000"/>
+              </a:solidFill>
+              <a:ea typeface="esamanru OTF Bold"/>
+            </a:endParaRPr>
           </a:p>
         </p:txBody>
       </p:sp>
@@ -17378,7 +17459,7 @@
           <p:nvPr/>
         </p:nvPicPr>
         <p:blipFill>
-          <a:blip r:embed="rId7"/>
+          <a:blip r:embed="rId11"/>
           <a:stretch>
             <a:fillRect/>
           </a:stretch>
@@ -17402,7 +17483,7 @@
           <p:nvPr/>
         </p:nvPicPr>
         <p:blipFill>
-          <a:blip r:embed="rId8">
+          <a:blip r:embed="rId12">
             <a:alphaModFix amt="7000"/>
           </a:blip>
           <a:stretch>
@@ -17590,12 +17671,12 @@
 </file>
 
 <file path=ppt/slides/slide6.xml><?xml version="1.0" encoding="utf-8"?>
-<p:sld xmlns:p="http://schemas.openxmlformats.org/presentationml/2006/main" xmlns:a="http://schemas.openxmlformats.org/drawingml/2006/main" xmlns:r="http://schemas.openxmlformats.org/officeDocument/2006/relationships">
+<p:sld xmlns:r="http://schemas.openxmlformats.org/officeDocument/2006/relationships" xmlns:c="http://schemas.openxmlformats.org/drawingml/2006/chart" xmlns:a="http://schemas.openxmlformats.org/drawingml/2006/main" xmlns:dgm="http://schemas.openxmlformats.org/drawingml/2006/diagram" xmlns:dsp="http://schemas.microsoft.com/office/drawing/2008/diagram" xmlns:p="http://schemas.openxmlformats.org/presentationml/2006/main">
   <p:cSld>
     <p:bg>
-      <p:bgPr>
+      <p:bgPr shadeToTitle="0">
         <a:solidFill>
-          <a:srgbClr val="EFEBE7"/>
+          <a:srgbClr val="efebe7"/>
         </a:solidFill>
       </p:bgPr>
     </p:bg>
@@ -17670,7 +17751,7 @@
           <p:nvPr/>
         </p:nvPicPr>
         <p:blipFill>
-          <a:blip r:embed="rId3"/>
+          <a:blip r:embed="rId4"/>
           <a:stretch>
             <a:fillRect/>
           </a:stretch>
@@ -17694,7 +17775,7 @@
           <p:nvPr/>
         </p:nvPicPr>
         <p:blipFill>
-          <a:blip r:embed="rId4"/>
+          <a:blip r:embed="rId5"/>
           <a:stretch>
             <a:fillRect/>
           </a:stretch>
@@ -17718,7 +17799,7 @@
           <p:nvPr/>
         </p:nvPicPr>
         <p:blipFill>
-          <a:blip r:embed="rId5"/>
+          <a:blip r:embed="rId6"/>
           <a:stretch>
             <a:fillRect/>
           </a:stretch>
@@ -17796,7 +17877,7 @@
           <p:nvPr/>
         </p:nvPicPr>
         <p:blipFill>
-          <a:blip r:embed="rId6">
+          <a:blip r:embed="rId7">
             <a:alphaModFix amt="45000"/>
           </a:blip>
           <a:stretch>
@@ -17876,7 +17957,7 @@
           <p:nvPr/>
         </p:nvPicPr>
         <p:blipFill>
-          <a:blip r:embed="rId7"/>
+          <a:blip r:embed="rId8"/>
           <a:stretch>
             <a:fillRect/>
           </a:stretch>
@@ -17900,7 +17981,7 @@
           <p:nvPr/>
         </p:nvPicPr>
         <p:blipFill>
-          <a:blip r:embed="rId8">
+          <a:blip r:embed="rId9">
             <a:alphaModFix amt="7000"/>
           </a:blip>
           <a:stretch>
@@ -17919,13 +18000,13 @@
       </p:pic>
       <p:sp>
         <p:nvSpPr>
-          <p:cNvPr name="TextBox 12" id="12"/>
-          <p:cNvSpPr txBox="true"/>
+          <p:cNvPr id="12" name="TextBox 12"/>
+          <p:cNvSpPr txBox="1"/>
           <p:nvPr/>
         </p:nvSpPr>
         <p:spPr>
-          <a:xfrm rot="0">
-            <a:off x="5118100" y="3492500"/>
+          <a:xfrm>
+            <a:off x="5143500" y="3492500"/>
             <a:ext cx="11391900" cy="495300"/>
           </a:xfrm>
           <a:prstGeom prst="rect">
@@ -17933,16 +18014,17 @@
           </a:prstGeom>
         </p:spPr>
         <p:txBody>
-          <a:bodyPr anchor="t" rtlCol="false" lIns="0" tIns="0" rIns="0" bIns="0"/>
+          <a:bodyPr lIns="0" tIns="0" rIns="0" bIns="0" anchor="t"/>
           <a:lstStyle/>
           <a:p>
-            <a:pPr algn="l" lvl="0">
+            <a:pPr lvl="0" algn="l">
               <a:lnSpc>
                 <a:spcPct val="141100"/>
               </a:lnSpc>
+              <a:defRPr/>
             </a:pPr>
             <a:r>
-              <a:rPr lang="ko-KR" sz="2800" b="false" i="false" u="none" strike="noStrike">
+              <a:rPr lang="ko-KR" sz="2800" b="0" i="0" u="none" strike="noStrike">
                 <a:solidFill>
                   <a:srgbClr val="000000"/>
                 </a:solidFill>
@@ -17951,7 +18033,7 @@
               <a:t>목공예</a:t>
             </a:r>
             <a:r>
-              <a:rPr lang="en-US" sz="2800" b="false" i="false" u="none" strike="noStrike">
+              <a:rPr lang="en-US" sz="2800" b="0" i="0" u="none" strike="noStrike">
                 <a:solidFill>
                   <a:srgbClr val="000000"/>
                 </a:solidFill>
@@ -17960,7 +18042,7 @@
               <a:t> </a:t>
             </a:r>
             <a:r>
-              <a:rPr lang="ko-KR" sz="2800" b="false" i="false" u="none" strike="noStrike">
+              <a:rPr lang="ko-KR" sz="2800" b="0" i="0" u="none" strike="noStrike">
                 <a:solidFill>
                   <a:srgbClr val="000000"/>
                 </a:solidFill>
@@ -17969,7 +18051,7 @@
               <a:t>전문</a:t>
             </a:r>
             <a:r>
-              <a:rPr lang="en-US" sz="2800" b="false" i="false" u="none" strike="noStrike">
+              <a:rPr lang="en-US" sz="2800" b="0" i="0" u="none" strike="noStrike">
                 <a:solidFill>
                   <a:srgbClr val="000000"/>
                 </a:solidFill>
@@ -17978,7 +18060,7 @@
               <a:t> </a:t>
             </a:r>
             <a:r>
-              <a:rPr lang="ko-KR" sz="2800" b="false" i="false" u="none" strike="noStrike">
+              <a:rPr lang="ko-KR" sz="2800" b="0" i="0" u="none" strike="noStrike">
                 <a:solidFill>
                   <a:srgbClr val="000000"/>
                 </a:solidFill>
@@ -17987,7 +18069,7 @@
               <a:t>강사</a:t>
             </a:r>
             <a:r>
-              <a:rPr lang="en-US" sz="2800" b="false" i="false" u="none" strike="noStrike">
+              <a:rPr lang="en-US" sz="2800" b="0" i="0" u="none" strike="noStrike">
                 <a:solidFill>
                   <a:srgbClr val="000000"/>
                 </a:solidFill>
@@ -17996,7 +18078,7 @@
               <a:t> </a:t>
             </a:r>
             <a:r>
-              <a:rPr lang="ko-KR" sz="2800" b="false" i="false" u="none" strike="noStrike">
+              <a:rPr lang="ko-KR" sz="2800" b="0" i="0" u="none" strike="noStrike">
                 <a:solidFill>
                   <a:srgbClr val="000000"/>
                 </a:solidFill>
@@ -18005,7 +18087,7 @@
               <a:t>및</a:t>
             </a:r>
             <a:r>
-              <a:rPr lang="en-US" sz="2800" b="false" i="false" u="none" strike="noStrike">
+              <a:rPr lang="en-US" sz="2800" b="0" i="0" u="none" strike="noStrike">
                 <a:solidFill>
                   <a:srgbClr val="000000"/>
                 </a:solidFill>
@@ -18014,7 +18096,7 @@
               <a:t> </a:t>
             </a:r>
             <a:r>
-              <a:rPr lang="ko-KR" sz="2800" b="false" i="false" u="none" strike="noStrike">
+              <a:rPr lang="ko-KR" sz="2800" b="0" i="0" u="none" strike="noStrike">
                 <a:solidFill>
                   <a:srgbClr val="000000"/>
                 </a:solidFill>
@@ -18023,7 +18105,7 @@
               <a:t>레진</a:t>
             </a:r>
             <a:r>
-              <a:rPr lang="en-US" sz="2800" b="false" i="false" u="none" strike="noStrike">
+              <a:rPr lang="en-US" sz="2800" b="0" i="0" u="none" strike="noStrike">
                 <a:solidFill>
                   <a:srgbClr val="000000"/>
                 </a:solidFill>
@@ -18032,7 +18114,7 @@
               <a:t> </a:t>
             </a:r>
             <a:r>
-              <a:rPr lang="ko-KR" sz="2800" b="false" i="false" u="none" strike="noStrike">
+              <a:rPr lang="ko-KR" sz="2800" b="0" i="0" u="none" strike="noStrike">
                 <a:solidFill>
                   <a:srgbClr val="000000"/>
                 </a:solidFill>
@@ -18041,7 +18123,7 @@
               <a:t>목공예</a:t>
             </a:r>
             <a:r>
-              <a:rPr lang="en-US" sz="2800" b="false" i="false" u="none" strike="noStrike">
+              <a:rPr lang="en-US" sz="2800" b="0" i="0" u="none" strike="noStrike">
                 <a:solidFill>
                   <a:srgbClr val="000000"/>
                 </a:solidFill>
@@ -18050,7 +18132,7 @@
               <a:t> </a:t>
             </a:r>
             <a:r>
-              <a:rPr lang="ko-KR" sz="2800" b="false" i="false" u="none" strike="noStrike">
+              <a:rPr lang="ko-KR" sz="2800" b="0" i="0" u="none" strike="noStrike">
                 <a:solidFill>
                   <a:srgbClr val="000000"/>
                 </a:solidFill>
@@ -18059,7 +18141,7 @@
               <a:t>지도사</a:t>
             </a:r>
             <a:r>
-              <a:rPr lang="en-US" sz="2800" b="false" i="false" u="none" strike="noStrike">
+              <a:rPr lang="en-US" sz="2800" b="0" i="0" u="none" strike="noStrike">
                 <a:solidFill>
                   <a:srgbClr val="000000"/>
                 </a:solidFill>
@@ -18068,14 +18150,38 @@
               <a:t> </a:t>
             </a:r>
             <a:r>
-              <a:rPr lang="ko-KR" sz="2800" b="false" i="false" u="none" strike="noStrike">
+              <a:rPr lang="ko-KR" altLang="en-US" sz="2800" b="0" i="0" u="none" strike="noStrike">
                 <a:solidFill>
                   <a:srgbClr val="000000"/>
                 </a:solidFill>
                 <a:ea typeface="esamanru OTF Bold"/>
               </a:rPr>
-              <a:t>배출</a:t>
-            </a:r>
+              <a:t>및 </a:t>
+            </a:r>
+            <a:r>
+              <a:rPr lang="en-US" altLang="ko-KR" sz="2800" b="0" i="0" u="none" strike="noStrike">
+                <a:solidFill>
+                  <a:srgbClr val="000000"/>
+                </a:solidFill>
+                <a:ea typeface="esamanru OTF Bold"/>
+              </a:rPr>
+              <a:t>ESG </a:t>
+            </a:r>
+            <a:r>
+              <a:rPr lang="ko-KR" altLang="en-US" sz="2800" b="0" i="0" u="none" strike="noStrike">
+                <a:solidFill>
+                  <a:srgbClr val="000000"/>
+                </a:solidFill>
+                <a:ea typeface="esamanru OTF Bold"/>
+              </a:rPr>
+              <a:t>전문 강사 배출</a:t>
+            </a:r>
+            <a:endParaRPr lang="ko-KR" altLang="en-US" sz="2800" b="0" i="0" u="none" strike="noStrike">
+              <a:solidFill>
+                <a:srgbClr val="000000"/>
+              </a:solidFill>
+              <a:ea typeface="esamanru OTF Bold"/>
+            </a:endParaRPr>
           </a:p>
         </p:txBody>
       </p:sp>
@@ -18088,7 +18194,7 @@
           <p:nvPr/>
         </p:nvPicPr>
         <p:blipFill>
-          <a:blip r:embed="rId6">
+          <a:blip r:embed="rId10">
             <a:alphaModFix amt="45000"/>
           </a:blip>
           <a:stretch>
@@ -18211,7 +18317,7 @@
           <p:nvPr/>
         </p:nvPicPr>
         <p:blipFill>
-          <a:blip r:embed="rId7"/>
+          <a:blip r:embed="rId11"/>
           <a:stretch>
             <a:fillRect/>
           </a:stretch>
@@ -18235,7 +18341,7 @@
           <p:nvPr/>
         </p:nvPicPr>
         <p:blipFill>
-          <a:blip r:embed="rId8">
+          <a:blip r:embed="rId12">
             <a:alphaModFix amt="7000"/>
           </a:blip>
           <a:stretch>
@@ -18254,13 +18360,13 @@
       </p:pic>
       <p:sp>
         <p:nvSpPr>
-          <p:cNvPr name="TextBox 17" id="17"/>
-          <p:cNvSpPr txBox="true"/>
+          <p:cNvPr id="17" name="TextBox 17"/>
+          <p:cNvSpPr txBox="1"/>
           <p:nvPr/>
         </p:nvSpPr>
         <p:spPr>
-          <a:xfrm rot="0">
-            <a:off x="5270500" y="6350000"/>
+          <a:xfrm>
+            <a:off x="5143499" y="5956300"/>
             <a:ext cx="11391900" cy="495300"/>
           </a:xfrm>
           <a:prstGeom prst="rect">
@@ -18268,25 +18374,53 @@
           </a:prstGeom>
         </p:spPr>
         <p:txBody>
-          <a:bodyPr anchor="t" rtlCol="false" lIns="0" tIns="0" rIns="0" bIns="0"/>
+          <a:bodyPr lIns="0" tIns="0" rIns="0" bIns="0" anchor="t"/>
           <a:lstStyle/>
           <a:p>
-            <a:pPr algn="l" lvl="0">
+            <a:pPr lvl="0" algn="l">
               <a:lnSpc>
                 <a:spcPct val="141100"/>
               </a:lnSpc>
+              <a:defRPr/>
             </a:pPr>
             <a:r>
-              <a:rPr lang="ko-KR" sz="2800" b="false" i="false" u="none" strike="noStrike">
+              <a:rPr lang="ko-KR" altLang="en-US" sz="2800" b="0" i="0" u="none" strike="noStrike">
                 <a:solidFill>
                   <a:srgbClr val="000000"/>
                 </a:solidFill>
                 <a:ea typeface="esamanru OTF Bold"/>
               </a:rPr>
+              <a:t>교육부 꿈길 체험공방</a:t>
+            </a:r>
+            <a:r>
+              <a:rPr lang="en-US" altLang="ko-KR" sz="2800" b="0" i="0" u="none" strike="noStrike">
+                <a:solidFill>
+                  <a:srgbClr val="000000"/>
+                </a:solidFill>
+                <a:ea typeface="esamanru OTF Bold"/>
+              </a:rPr>
+              <a:t>,</a:t>
+            </a:r>
+            <a:r>
+              <a:rPr lang="ko-KR" altLang="en-US" sz="2800" b="0" i="0" u="none" strike="noStrike">
+                <a:solidFill>
+                  <a:srgbClr val="000000"/>
+                </a:solidFill>
+                <a:ea typeface="esamanru OTF Bold"/>
+              </a:rPr>
+              <a:t> 의정부시 </a:t>
+            </a:r>
+            <a:r>
+              <a:rPr lang="ko-KR" sz="2800" b="0" i="0" u="none" strike="noStrike">
+                <a:solidFill>
+                  <a:srgbClr val="000000"/>
+                </a:solidFill>
+                <a:ea typeface="esamanru OTF Bold"/>
+              </a:rPr>
               <a:t>평생학습원</a:t>
             </a:r>
             <a:r>
-              <a:rPr lang="en-US" sz="2800" b="false" i="false" u="none" strike="noStrike">
+              <a:rPr lang="en-US" sz="2800" b="0" i="0" u="none" strike="noStrike">
                 <a:solidFill>
                   <a:srgbClr val="000000"/>
                 </a:solidFill>
@@ -18295,16 +18429,25 @@
               <a:t>, </a:t>
             </a:r>
             <a:r>
-              <a:rPr lang="ko-KR" sz="2800" b="false" i="false" u="none" strike="noStrike">
+              <a:rPr lang="ko-KR" altLang="en-US" sz="2800" b="0" i="0" u="none" strike="noStrike">
                 <a:solidFill>
                   <a:srgbClr val="000000"/>
                 </a:solidFill>
                 <a:ea typeface="esamanru OTF Bold"/>
               </a:rPr>
-              <a:t>청소년수련관</a:t>
-            </a:r>
-            <a:r>
-              <a:rPr lang="en-US" sz="2800" b="false" i="false" u="none" strike="noStrike">
+              <a:t>의정부시 청</a:t>
+            </a:r>
+            <a:r>
+              <a:rPr lang="ko-KR" sz="2800" b="0" i="0" u="none" strike="noStrike">
+                <a:solidFill>
+                  <a:srgbClr val="000000"/>
+                </a:solidFill>
+                <a:ea typeface="esamanru OTF Bold"/>
+              </a:rPr>
+              <a:t>소년수련관</a:t>
+            </a:r>
+            <a:r>
+              <a:rPr lang="en-US" sz="2800" b="0" i="0" u="none" strike="noStrike">
                 <a:solidFill>
                   <a:srgbClr val="000000"/>
                 </a:solidFill>
@@ -18312,8 +18455,22 @@
               </a:rPr>
               <a:t>, </a:t>
             </a:r>
-            <a:r>
-              <a:rPr lang="ko-KR" sz="2800" b="false" i="false" u="none" strike="noStrike">
+            <a:endParaRPr lang="ko-KR" sz="2800" b="0" i="0" u="none" strike="noStrike">
+              <a:solidFill>
+                <a:srgbClr val="000000"/>
+              </a:solidFill>
+              <a:ea typeface="esamanru OTF Bold"/>
+            </a:endParaRPr>
+          </a:p>
+          <a:p>
+            <a:pPr lvl="0" algn="l">
+              <a:lnSpc>
+                <a:spcPct val="141100"/>
+              </a:lnSpc>
+              <a:defRPr/>
+            </a:pPr>
+            <a:r>
+              <a:rPr lang="ko-KR" sz="2800" b="0" i="0" u="none" strike="noStrike">
                 <a:solidFill>
                   <a:srgbClr val="000000"/>
                 </a:solidFill>
@@ -18322,25 +18479,34 @@
               <a:t>치매안심센터</a:t>
             </a:r>
             <a:r>
-              <a:rPr lang="en-US" sz="2800" b="false" i="false" u="none" strike="noStrike">
+              <a:rPr lang="en-US" sz="2800" b="0" i="0" u="none" strike="noStrike">
                 <a:solidFill>
                   <a:srgbClr val="000000"/>
                 </a:solidFill>
                 <a:latin typeface="esamanru OTF Bold"/>
               </a:rPr>
-              <a:t>, </a:t>
-            </a:r>
-            <a:r>
-              <a:rPr lang="ko-KR" sz="2800" b="false" i="false" u="none" strike="noStrike">
+              <a:t>,</a:t>
+            </a:r>
+            <a:r>
+              <a:rPr lang="ko-KR" altLang="en-US" sz="2800" b="0" i="0" u="none" strike="noStrike">
+                <a:solidFill>
+                  <a:srgbClr val="000000"/>
+                </a:solidFill>
+                <a:latin typeface="esamanru OTF Bold"/>
+              </a:rPr>
+              <a:t> </a:t>
+            </a:r>
+            <a:r>
+              <a:rPr lang="ko-KR" altLang="en-US" sz="2800" b="0" i="0" u="none" strike="noStrike">
                 <a:solidFill>
                   <a:srgbClr val="000000"/>
                 </a:solidFill>
                 <a:ea typeface="esamanru OTF Bold"/>
               </a:rPr>
-              <a:t>꿈길</a:t>
-            </a:r>
-            <a:r>
-              <a:rPr lang="en-US" sz="2800" b="false" i="false" u="none" strike="noStrike">
+              <a:t>서울시 학교밖 청소년 지원공방</a:t>
+            </a:r>
+            <a:r>
+              <a:rPr lang="en-US" sz="2800" b="0" i="0" u="none" strike="noStrike">
                 <a:solidFill>
                   <a:srgbClr val="000000"/>
                 </a:solidFill>
@@ -18349,16 +18515,16 @@
               <a:t> </a:t>
             </a:r>
             <a:r>
-              <a:rPr lang="ko-KR" sz="2800" b="false" i="false" u="none" strike="noStrike">
+              <a:rPr lang="ko-KR" sz="2800" b="0" i="0" u="none" strike="noStrike">
                 <a:solidFill>
                   <a:srgbClr val="000000"/>
                 </a:solidFill>
                 <a:ea typeface="esamanru OTF Bold"/>
               </a:rPr>
-              <a:t>체험공방</a:t>
-            </a:r>
-            <a:r>
-              <a:rPr lang="en-US" sz="2800" b="false" i="false" u="none" strike="noStrike">
+              <a:t>등록</a:t>
+            </a:r>
+            <a:r>
+              <a:rPr lang="en-US" sz="2800" b="0" i="0" u="none" strike="noStrike">
                 <a:solidFill>
                   <a:srgbClr val="000000"/>
                 </a:solidFill>
@@ -18367,16 +18533,16 @@
               <a:t> </a:t>
             </a:r>
             <a:r>
-              <a:rPr lang="ko-KR" sz="2800" b="false" i="false" u="none" strike="noStrike">
+              <a:rPr lang="ko-KR" sz="2800" b="0" i="0" u="none" strike="noStrike">
                 <a:solidFill>
                   <a:srgbClr val="000000"/>
                 </a:solidFill>
                 <a:ea typeface="esamanru OTF Bold"/>
               </a:rPr>
-              <a:t>등</a:t>
-            </a:r>
-            <a:r>
-              <a:rPr lang="en-US" sz="2800" b="false" i="false" u="none" strike="noStrike">
+              <a:t>및</a:t>
+            </a:r>
+            <a:r>
+              <a:rPr lang="en-US" sz="2800" b="0" i="0" u="none" strike="noStrike">
                 <a:solidFill>
                   <a:srgbClr val="000000"/>
                 </a:solidFill>
@@ -18385,50 +18551,20 @@
               <a:t> </a:t>
             </a:r>
             <a:r>
-              <a:rPr lang="ko-KR" sz="2800" b="false" i="false" u="none" strike="noStrike">
+              <a:rPr lang="ko-KR" sz="2800" b="0" i="0" u="none" strike="noStrike">
                 <a:solidFill>
                   <a:srgbClr val="000000"/>
                 </a:solidFill>
                 <a:ea typeface="esamanru OTF Bold"/>
               </a:rPr>
-              <a:t>등록</a:t>
-            </a:r>
-            <a:r>
-              <a:rPr lang="en-US" sz="2800" b="false" i="false" u="none" strike="noStrike">
-                <a:solidFill>
-                  <a:srgbClr val="000000"/>
-                </a:solidFill>
-                <a:latin typeface="esamanru OTF Bold"/>
-              </a:rPr>
-              <a:t> </a:t>
-            </a:r>
-            <a:r>
-              <a:rPr lang="ko-KR" sz="2800" b="false" i="false" u="none" strike="noStrike">
-                <a:solidFill>
-                  <a:srgbClr val="000000"/>
-                </a:solidFill>
-                <a:ea typeface="esamanru OTF Bold"/>
-              </a:rPr>
-              <a:t>및</a:t>
-            </a:r>
-            <a:r>
-              <a:rPr lang="en-US" sz="2800" b="false" i="false" u="none" strike="noStrike">
-                <a:solidFill>
-                  <a:srgbClr val="000000"/>
-                </a:solidFill>
-                <a:latin typeface="esamanru OTF Bold"/>
-              </a:rPr>
-              <a:t> </a:t>
-            </a:r>
-            <a:r>
-              <a:rPr lang="ko-KR" sz="2800" b="false" i="false" u="none" strike="noStrike">
-                <a:solidFill>
-                  <a:srgbClr val="000000"/>
-                </a:solidFill>
-                <a:ea typeface="esamanru OTF Bold"/>
-              </a:rPr>
               <a:t>활동</a:t>
             </a:r>
+            <a:endParaRPr lang="ko-KR" sz="2800" b="0" i="0" u="none" strike="noStrike">
+              <a:solidFill>
+                <a:srgbClr val="000000"/>
+              </a:solidFill>
+              <a:ea typeface="esamanru OTF Bold"/>
+            </a:endParaRPr>
           </a:p>
         </p:txBody>
       </p:sp>
@@ -19401,12 +19537,12 @@
 </file>
 
 <file path=ppt/slides/slide9.xml><?xml version="1.0" encoding="utf-8"?>
-<p:sld xmlns:p="http://schemas.openxmlformats.org/presentationml/2006/main" xmlns:a="http://schemas.openxmlformats.org/drawingml/2006/main" xmlns:r="http://schemas.openxmlformats.org/officeDocument/2006/relationships">
+<p:sld xmlns:r="http://schemas.openxmlformats.org/officeDocument/2006/relationships" xmlns:c="http://schemas.openxmlformats.org/drawingml/2006/chart" xmlns:a="http://schemas.openxmlformats.org/drawingml/2006/main" xmlns:dgm="http://schemas.openxmlformats.org/drawingml/2006/diagram" xmlns:dsp="http://schemas.microsoft.com/office/drawing/2008/diagram" xmlns:p="http://schemas.openxmlformats.org/presentationml/2006/main">
   <p:cSld>
     <p:bg>
-      <p:bgPr>
+      <p:bgPr shadeToTitle="0">
         <a:solidFill>
-          <a:srgbClr val="EFEBE7"/>
+          <a:srgbClr val="efebe7"/>
         </a:solidFill>
       </p:bgPr>
     </p:bg>
@@ -19481,7 +19617,7 @@
           <p:nvPr/>
         </p:nvPicPr>
         <p:blipFill>
-          <a:blip r:embed="rId3"/>
+          <a:blip r:embed="rId4"/>
           <a:stretch>
             <a:fillRect/>
           </a:stretch>
@@ -19505,7 +19641,7 @@
           <p:nvPr/>
         </p:nvPicPr>
         <p:blipFill>
-          <a:blip r:embed="rId4"/>
+          <a:blip r:embed="rId5"/>
           <a:stretch>
             <a:fillRect/>
           </a:stretch>
@@ -19529,7 +19665,7 @@
           <p:nvPr/>
         </p:nvPicPr>
         <p:blipFill>
-          <a:blip r:embed="rId5"/>
+          <a:blip r:embed="rId6"/>
           <a:stretch>
             <a:fillRect/>
           </a:stretch>
@@ -19636,12 +19772,12 @@
       </p:sp>
       <p:sp>
         <p:nvSpPr>
-          <p:cNvPr name="TextBox 8" id="8"/>
-          <p:cNvSpPr txBox="true"/>
+          <p:cNvPr id="8" name="TextBox 8"/>
+          <p:cNvSpPr txBox="1"/>
           <p:nvPr/>
         </p:nvSpPr>
         <p:spPr>
-          <a:xfrm rot="0">
+          <a:xfrm>
             <a:off x="9042400" y="5524500"/>
             <a:ext cx="8077200" cy="1612900"/>
           </a:xfrm>
@@ -19650,16 +19786,17 @@
           </a:prstGeom>
         </p:spPr>
         <p:txBody>
-          <a:bodyPr anchor="t" rtlCol="false" lIns="0" tIns="0" rIns="0" bIns="0"/>
+          <a:bodyPr lIns="0" tIns="0" rIns="0" bIns="0" anchor="t"/>
           <a:lstStyle/>
           <a:p>
-            <a:pPr algn="l" lvl="0">
+            <a:pPr lvl="0" algn="l">
               <a:lnSpc>
                 <a:spcPct val="141100"/>
               </a:lnSpc>
+              <a:defRPr/>
             </a:pPr>
             <a:r>
-              <a:rPr lang="ko-KR" sz="4100" b="false" i="false" u="none" strike="noStrike">
+              <a:rPr lang="ko-KR" sz="4100" b="0" i="0" u="none" strike="noStrike">
                 <a:solidFill>
                   <a:srgbClr val="000000"/>
                 </a:solidFill>
@@ -19668,7 +19805,7 @@
               <a:t>지역사회</a:t>
             </a:r>
             <a:r>
-              <a:rPr lang="en-US" sz="4100" b="false" i="false" u="none" strike="noStrike">
+              <a:rPr lang="en-US" sz="4100" b="0" i="0" u="none" strike="noStrike">
                 <a:solidFill>
                   <a:srgbClr val="000000"/>
                 </a:solidFill>
@@ -19677,7 +19814,7 @@
               <a:t> </a:t>
             </a:r>
             <a:r>
-              <a:rPr lang="ko-KR" sz="4100" b="false" i="false" u="none" strike="noStrike">
+              <a:rPr lang="ko-KR" sz="4100" b="0" i="0" u="none" strike="noStrike">
                 <a:solidFill>
                   <a:srgbClr val="000000"/>
                 </a:solidFill>
@@ -19686,7 +19823,7 @@
               <a:t>연계</a:t>
             </a:r>
             <a:r>
-              <a:rPr lang="en-US" sz="4100" b="false" i="false" u="none" strike="noStrike">
+              <a:rPr lang="en-US" sz="4100" b="0" i="0" u="none" strike="noStrike">
                 <a:solidFill>
                   <a:srgbClr val="000000"/>
                 </a:solidFill>
@@ -19695,7 +19832,7 @@
               <a:t>, </a:t>
             </a:r>
             <a:r>
-              <a:rPr lang="ko-KR" sz="4100" b="false" i="false" u="none" strike="noStrike">
+              <a:rPr lang="ko-KR" sz="4100" b="0" i="0" u="none" strike="noStrike">
                 <a:solidFill>
                   <a:srgbClr val="000000"/>
                 </a:solidFill>
@@ -19704,7 +19841,7 @@
               <a:t>강사</a:t>
             </a:r>
             <a:r>
-              <a:rPr lang="en-US" sz="4100" b="false" i="false" u="none" strike="noStrike">
+              <a:rPr lang="en-US" sz="4100" b="0" i="0" u="none" strike="noStrike">
                 <a:solidFill>
                   <a:srgbClr val="000000"/>
                 </a:solidFill>
@@ -19713,7 +19850,7 @@
               <a:t> </a:t>
             </a:r>
             <a:r>
-              <a:rPr lang="ko-KR" sz="4100" b="false" i="false" u="none" strike="noStrike">
+              <a:rPr lang="ko-KR" sz="4100" b="0" i="0" u="none" strike="noStrike">
                 <a:solidFill>
                   <a:srgbClr val="000000"/>
                 </a:solidFill>
@@ -19722,7 +19859,7 @@
               <a:t>양성을</a:t>
             </a:r>
             <a:r>
-              <a:rPr lang="en-US" sz="4100" b="false" i="false" u="none" strike="noStrike">
+              <a:rPr lang="en-US" sz="4100" b="0" i="0" u="none" strike="noStrike">
                 <a:solidFill>
                   <a:srgbClr val="000000"/>
                 </a:solidFill>
@@ -19731,7 +19868,7 @@
               <a:t> </a:t>
             </a:r>
             <a:r>
-              <a:rPr lang="ko-KR" sz="4100" b="false" i="false" u="none" strike="noStrike">
+              <a:rPr lang="ko-KR" sz="4100" b="0" i="0" u="none" strike="noStrike">
                 <a:solidFill>
                   <a:srgbClr val="000000"/>
                 </a:solidFill>
@@ -19739,24 +19876,40 @@
               </a:rPr>
               <a:t>통한</a:t>
             </a:r>
-          </a:p>
-          <a:p>
-            <a:pPr algn="l" lvl="0">
+            <a:endParaRPr lang="ko-KR" sz="4100" b="0" i="0" u="none" strike="noStrike">
+              <a:solidFill>
+                <a:srgbClr val="000000"/>
+              </a:solidFill>
+              <a:ea typeface="esamanru OTF Bold"/>
+            </a:endParaRPr>
+          </a:p>
+          <a:p>
+            <a:pPr lvl="0" algn="l">
               <a:lnSpc>
                 <a:spcPct val="141100"/>
               </a:lnSpc>
+              <a:defRPr/>
             </a:pPr>
             <a:r>
-              <a:rPr lang="en-US" sz="4100" b="false" i="false" u="none" strike="noStrike">
+              <a:rPr lang="ko-KR" altLang="en-US" sz="4100" b="0" i="0" u="none" strike="noStrike">
+                <a:solidFill>
+                  <a:srgbClr val="000000"/>
+                </a:solidFill>
+                <a:ea typeface="esamanru OTF Bold"/>
+              </a:rPr>
+              <a:t>지속가능한</a:t>
+            </a:r>
+            <a:r>
+              <a:rPr lang="ko-KR" altLang="en-US" sz="4100" b="0" i="0" u="none" strike="noStrike">
                 <a:solidFill>
                   <a:srgbClr val="000000"/>
                 </a:solidFill>
                 <a:latin typeface="esamanru OTF Bold"/>
               </a:rPr>
-              <a:t> </a:t>
-            </a:r>
-            <a:r>
-              <a:rPr lang="ko-KR" sz="4100" b="false" i="false" u="none" strike="noStrike">
+              <a:t> </a:t>
+            </a:r>
+            <a:r>
+              <a:rPr lang="ko-KR" sz="4100" b="0" i="0" u="none" strike="noStrike">
                 <a:solidFill>
                   <a:srgbClr val="000000"/>
                 </a:solidFill>
@@ -19765,7 +19918,7 @@
               <a:t>일자리</a:t>
             </a:r>
             <a:r>
-              <a:rPr lang="en-US" sz="4100" b="false" i="false" u="none" strike="noStrike">
+              <a:rPr lang="en-US" sz="4100" b="0" i="0" u="none" strike="noStrike">
                 <a:solidFill>
                   <a:srgbClr val="000000"/>
                 </a:solidFill>
@@ -19774,7 +19927,7 @@
               <a:t> </a:t>
             </a:r>
             <a:r>
-              <a:rPr lang="ko-KR" sz="4100" b="false" i="false" u="none" strike="noStrike">
+              <a:rPr lang="ko-KR" sz="4100" b="0" i="0" u="none" strike="noStrike">
                 <a:solidFill>
                   <a:srgbClr val="000000"/>
                 </a:solidFill>
@@ -19783,7 +19936,7 @@
               <a:t>및</a:t>
             </a:r>
             <a:r>
-              <a:rPr lang="en-US" sz="4100" b="false" i="false" u="none" strike="noStrike">
+              <a:rPr lang="en-US" sz="4100" b="0" i="0" u="none" strike="noStrike">
                 <a:solidFill>
                   <a:srgbClr val="000000"/>
                 </a:solidFill>
@@ -19792,7 +19945,7 @@
               <a:t> </a:t>
             </a:r>
             <a:r>
-              <a:rPr lang="ko-KR" sz="4100" b="false" i="false" u="none" strike="noStrike">
+              <a:rPr lang="ko-KR" sz="4100" b="0" i="0" u="none" strike="noStrike">
                 <a:solidFill>
                   <a:srgbClr val="000000"/>
                 </a:solidFill>
@@ -19801,7 +19954,7 @@
               <a:t>교육</a:t>
             </a:r>
             <a:r>
-              <a:rPr lang="en-US" sz="4100" b="false" i="false" u="none" strike="noStrike">
+              <a:rPr lang="en-US" sz="4100" b="0" i="0" u="none" strike="noStrike">
                 <a:solidFill>
                   <a:srgbClr val="000000"/>
                 </a:solidFill>
@@ -19810,7 +19963,7 @@
               <a:t> </a:t>
             </a:r>
             <a:r>
-              <a:rPr lang="ko-KR" sz="4100" b="false" i="false" u="none" strike="noStrike">
+              <a:rPr lang="ko-KR" sz="4100" b="0" i="0" u="none" strike="noStrike">
                 <a:solidFill>
                   <a:srgbClr val="000000"/>
                 </a:solidFill>
@@ -19818,6 +19971,12 @@
               </a:rPr>
               <a:t>확대</a:t>
             </a:r>
+            <a:endParaRPr lang="ko-KR" sz="4100" b="0" i="0" u="none" strike="noStrike">
+              <a:solidFill>
+                <a:srgbClr val="000000"/>
+              </a:solidFill>
+              <a:ea typeface="esamanru OTF Bold"/>
+            </a:endParaRPr>
           </a:p>
         </p:txBody>
       </p:sp>
@@ -19902,7 +20061,7 @@
           <p:nvPr/>
         </p:nvPicPr>
         <p:blipFill>
-          <a:blip r:embed="rId6"/>
+          <a:blip r:embed="rId7"/>
           <a:stretch>
             <a:fillRect/>
           </a:stretch>

--- a/ppt자료/우스레-공방-프로그램-제안.pptx
+++ b/ppt자료/우스레-공방-프로그램-제안.pptx
@@ -4345,45 +4345,54 @@
                 </a:solidFill>
                 <a:ea typeface="Pretendard Bold"/>
               </a:rPr>
-              <a:t>출장형</a:t>
-            </a:r>
-            <a:r>
-              <a:rPr lang="en-US" sz="3800" b="0" i="0" u="none" strike="noStrike">
-                <a:solidFill>
-                  <a:srgbClr val="715130"/>
-                </a:solidFill>
-                <a:latin typeface="Pretendard Bold"/>
-              </a:rPr>
-              <a:t> / </a:t>
-            </a:r>
-            <a:r>
-              <a:rPr lang="ko-KR" sz="3800" b="0" i="0" u="none" strike="noStrike">
-                <a:solidFill>
-                  <a:srgbClr val="715130"/>
-                </a:solidFill>
-                <a:ea typeface="Pretendard Bold"/>
-              </a:rPr>
-              <a:t>공방형</a:t>
-            </a:r>
-            <a:r>
-              <a:rPr lang="en-US" sz="3800" b="0" i="0" u="none" strike="noStrike">
-                <a:solidFill>
-                  <a:srgbClr val="715130"/>
-                </a:solidFill>
-                <a:latin typeface="Pretendard Bold"/>
-              </a:rPr>
-              <a:t> / </a:t>
-            </a:r>
-            <a:r>
-              <a:rPr lang="ko-KR" sz="3800" b="0" i="0" u="none" strike="noStrike">
-                <a:solidFill>
-                  <a:srgbClr val="715130"/>
-                </a:solidFill>
-                <a:ea typeface="Pretendard Bold"/>
-              </a:rPr>
               <a:t>학교수업형</a:t>
             </a:r>
-            <a:endParaRPr lang="ko-KR" sz="3800" b="0" i="0" u="none" strike="noStrike">
+            <a:r>
+              <a:rPr lang="ko-KR" altLang="en-US" sz="3800" b="0" i="0" u="none" strike="noStrike">
+                <a:solidFill>
+                  <a:srgbClr val="715130"/>
+                </a:solidFill>
+                <a:ea typeface="Pretendard Bold"/>
+              </a:rPr>
+              <a:t> </a:t>
+            </a:r>
+            <a:r>
+              <a:rPr lang="en-US" altLang="ko-KR" sz="3800" b="0" i="0" u="none" strike="noStrike">
+                <a:solidFill>
+                  <a:srgbClr val="715130"/>
+                </a:solidFill>
+                <a:ea typeface="Pretendard Bold"/>
+              </a:rPr>
+              <a:t>/</a:t>
+            </a:r>
+            <a:r>
+              <a:rPr lang="ko-KR" altLang="en-US" sz="3800" b="0" i="0" u="none" strike="noStrike">
+                <a:solidFill>
+                  <a:srgbClr val="715130"/>
+                </a:solidFill>
+                <a:ea typeface="Pretendard Bold"/>
+              </a:rPr>
+              <a:t> 공방형 </a:t>
+            </a:r>
+            <a:r>
+              <a:rPr lang="en-US" altLang="ko-KR" sz="3800" b="0" i="0" u="none" strike="noStrike">
+                <a:solidFill>
+                  <a:srgbClr val="715130"/>
+                </a:solidFill>
+                <a:ea typeface="Pretendard Bold"/>
+              </a:rPr>
+              <a:t>/</a:t>
+            </a:r>
+            <a:r>
+              <a:rPr lang="ko-KR" altLang="en-US" sz="3800" b="0" i="0" u="none" strike="noStrike">
+                <a:solidFill>
+                  <a:srgbClr val="715130"/>
+                </a:solidFill>
+                <a:ea typeface="Pretendard Bold"/>
+              </a:rPr>
+              <a:t> 출장형</a:t>
+            </a:r>
+            <a:endParaRPr lang="ko-KR" altLang="en-US" sz="3800" b="0" i="0" u="none" strike="noStrike">
               <a:solidFill>
                 <a:srgbClr val="715130"/>
               </a:solidFill>
@@ -4573,42 +4582,6 @@
                 <a:ea typeface="esamanru OTF Bold"/>
               </a:rPr>
               <a:t>개요</a:t>
-            </a:r>
-          </a:p>
-        </p:txBody>
-      </p:sp>
-      <p:sp>
-        <p:nvSpPr>
-          <p:cNvPr name="TextBox 11" id="11"/>
-          <p:cNvSpPr txBox="true"/>
-          <p:nvPr/>
-        </p:nvSpPr>
-        <p:spPr>
-          <a:xfrm rot="0">
-            <a:off x="10350500" y="1041400"/>
-            <a:ext cx="6845300" cy="279400"/>
-          </a:xfrm>
-          <a:prstGeom prst="rect">
-            <a:avLst/>
-          </a:prstGeom>
-        </p:spPr>
-        <p:txBody>
-          <a:bodyPr anchor="ctr" rtlCol="false" lIns="0" tIns="0" rIns="0" bIns="0"/>
-          <a:lstStyle/>
-          <a:p>
-            <a:pPr algn="r" lvl="0">
-              <a:lnSpc>
-                <a:spcPct val="108729"/>
-              </a:lnSpc>
-            </a:pPr>
-            <a:r>
-              <a:rPr lang="en-US" sz="1600" b="false" i="false" u="none" strike="noStrike" spc="100">
-                <a:solidFill>
-                  <a:srgbClr val="B0966E"/>
-                </a:solidFill>
-                <a:latin typeface="Pretendard Medium"/>
-              </a:rPr>
-              <a:t>PAGE 07</a:t>
             </a:r>
           </a:p>
         </p:txBody>
@@ -4622,12 +4595,12 @@
 </file>
 
 <file path=ppt/slides/slide11.xml><?xml version="1.0" encoding="utf-8"?>
-<p:sld xmlns:p="http://schemas.openxmlformats.org/presentationml/2006/main" xmlns:a="http://schemas.openxmlformats.org/drawingml/2006/main" xmlns:r="http://schemas.openxmlformats.org/officeDocument/2006/relationships">
+<p:sld xmlns:r="http://schemas.openxmlformats.org/officeDocument/2006/relationships" xmlns:c="http://schemas.openxmlformats.org/drawingml/2006/chart" xmlns:a="http://schemas.openxmlformats.org/drawingml/2006/main" xmlns:dgm="http://schemas.openxmlformats.org/drawingml/2006/diagram" xmlns:dsp="http://schemas.microsoft.com/office/drawing/2008/diagram" xmlns:p="http://schemas.openxmlformats.org/presentationml/2006/main">
   <p:cSld>
     <p:bg>
-      <p:bgPr>
+      <p:bgPr shadeToTitle="0">
         <a:solidFill>
-          <a:srgbClr val="EFEBE7"/>
+          <a:srgbClr val="efebe7"/>
         </a:solidFill>
       </p:bgPr>
     </p:bg>
@@ -4750,7 +4723,7 @@
           <p:nvPr/>
         </p:nvPicPr>
         <p:blipFill>
-          <a:blip r:embed="rId5"/>
+          <a:blip r:embed="rId6"/>
           <a:stretch>
             <a:fillRect/>
           </a:stretch>
@@ -4774,7 +4747,7 @@
           <p:nvPr/>
         </p:nvPicPr>
         <p:blipFill>
-          <a:blip r:embed="rId6"/>
+          <a:blip r:embed="rId7"/>
           <a:stretch>
             <a:fillRect/>
           </a:stretch>
@@ -4798,7 +4771,7 @@
           <p:nvPr/>
         </p:nvPicPr>
         <p:blipFill>
-          <a:blip r:embed="rId7"/>
+          <a:blip r:embed="rId8"/>
           <a:stretch>
             <a:fillRect/>
           </a:stretch>
@@ -4822,7 +4795,7 @@
           <p:nvPr/>
         </p:nvPicPr>
         <p:blipFill>
-          <a:blip r:embed="rId8"/>
+          <a:blip r:embed="rId9"/>
           <a:stretch>
             <a:fillRect/>
           </a:stretch>
@@ -4846,7 +4819,7 @@
           <p:nvPr/>
         </p:nvPicPr>
         <p:blipFill>
-          <a:blip r:embed="rId9"/>
+          <a:blip r:embed="rId10"/>
           <a:stretch>
             <a:fillRect/>
           </a:stretch>
@@ -5240,42 +5213,6 @@
                 <a:ea typeface="esamanru OTF Bold"/>
               </a:rPr>
               <a:t>배경</a:t>
-            </a:r>
-          </a:p>
-        </p:txBody>
-      </p:sp>
-      <p:sp>
-        <p:nvSpPr>
-          <p:cNvPr name="TextBox 13" id="13"/>
-          <p:cNvSpPr txBox="true"/>
-          <p:nvPr/>
-        </p:nvSpPr>
-        <p:spPr>
-          <a:xfrm rot="0">
-            <a:off x="10350500" y="1041400"/>
-            <a:ext cx="6845300" cy="279400"/>
-          </a:xfrm>
-          <a:prstGeom prst="rect">
-            <a:avLst/>
-          </a:prstGeom>
-        </p:spPr>
-        <p:txBody>
-          <a:bodyPr anchor="ctr" rtlCol="false" lIns="0" tIns="0" rIns="0" bIns="0"/>
-          <a:lstStyle/>
-          <a:p>
-            <a:pPr algn="r" lvl="0">
-              <a:lnSpc>
-                <a:spcPct val="108729"/>
-              </a:lnSpc>
-            </a:pPr>
-            <a:r>
-              <a:rPr lang="en-US" sz="1600" b="false" i="false" u="none" strike="noStrike" spc="100">
-                <a:solidFill>
-                  <a:srgbClr val="B0966E"/>
-                </a:solidFill>
-                <a:latin typeface="Pretendard Medium"/>
-              </a:rPr>
-              <a:t>PAGE 07</a:t>
             </a:r>
           </a:p>
         </p:txBody>
@@ -6146,42 +6083,6 @@
           </a:p>
         </p:txBody>
       </p:sp>
-      <p:sp>
-        <p:nvSpPr>
-          <p:cNvPr name="TextBox 11" id="11"/>
-          <p:cNvSpPr txBox="true"/>
-          <p:nvPr/>
-        </p:nvSpPr>
-        <p:spPr>
-          <a:xfrm rot="0">
-            <a:off x="10350500" y="1041400"/>
-            <a:ext cx="6845300" cy="279400"/>
-          </a:xfrm>
-          <a:prstGeom prst="rect">
-            <a:avLst/>
-          </a:prstGeom>
-        </p:spPr>
-        <p:txBody>
-          <a:bodyPr anchor="ctr" rtlCol="false" lIns="0" tIns="0" rIns="0" bIns="0"/>
-          <a:lstStyle/>
-          <a:p>
-            <a:pPr algn="r" lvl="0">
-              <a:lnSpc>
-                <a:spcPct val="108729"/>
-              </a:lnSpc>
-            </a:pPr>
-            <a:r>
-              <a:rPr lang="en-US" sz="1600" b="false" i="false" u="none" strike="noStrike" spc="100">
-                <a:solidFill>
-                  <a:srgbClr val="B0966E"/>
-                </a:solidFill>
-                <a:latin typeface="Pretendard Medium"/>
-              </a:rPr>
-              <a:t>PAGE 07</a:t>
-            </a:r>
-          </a:p>
-        </p:txBody>
-      </p:sp>
     </p:spTree>
   </p:cSld>
   <p:clrMapOvr>
@@ -6191,12 +6092,12 @@
 </file>
 
 <file path=ppt/slides/slide13.xml><?xml version="1.0" encoding="utf-8"?>
-<p:sld xmlns:p="http://schemas.openxmlformats.org/presentationml/2006/main" xmlns:a="http://schemas.openxmlformats.org/drawingml/2006/main" xmlns:r="http://schemas.openxmlformats.org/officeDocument/2006/relationships">
+<p:sld xmlns:r="http://schemas.openxmlformats.org/officeDocument/2006/relationships" xmlns:c="http://schemas.openxmlformats.org/drawingml/2006/chart" xmlns:a="http://schemas.openxmlformats.org/drawingml/2006/main" xmlns:dgm="http://schemas.openxmlformats.org/drawingml/2006/diagram" xmlns:dsp="http://schemas.microsoft.com/office/drawing/2008/diagram" xmlns:p="http://schemas.openxmlformats.org/presentationml/2006/main">
   <p:cSld>
     <p:bg>
-      <p:bgPr>
+      <p:bgPr shadeToTitle="0">
         <a:solidFill>
-          <a:srgbClr val="EFEBE7"/>
+          <a:srgbClr val="efebe7"/>
         </a:solidFill>
       </p:bgPr>
     </p:bg>
@@ -6319,7 +6220,7 @@
           <p:nvPr/>
         </p:nvPicPr>
         <p:blipFill>
-          <a:blip r:embed="rId5"/>
+          <a:blip r:embed="rId6"/>
           <a:stretch>
             <a:fillRect/>
           </a:stretch>
@@ -6343,7 +6244,7 @@
           <p:nvPr/>
         </p:nvPicPr>
         <p:blipFill>
-          <a:blip r:embed="rId6"/>
+          <a:blip r:embed="rId7"/>
           <a:stretch>
             <a:fillRect/>
           </a:stretch>
@@ -6367,7 +6268,7 @@
           <p:nvPr/>
         </p:nvPicPr>
         <p:blipFill>
-          <a:blip r:embed="rId7"/>
+          <a:blip r:embed="rId8"/>
           <a:stretch>
             <a:fillRect/>
           </a:stretch>
@@ -6833,42 +6734,6 @@
                 <a:ea typeface="esamanru OTF Bold"/>
               </a:rPr>
               <a:t>구성</a:t>
-            </a:r>
-          </a:p>
-        </p:txBody>
-      </p:sp>
-      <p:sp>
-        <p:nvSpPr>
-          <p:cNvPr name="TextBox 11" id="11"/>
-          <p:cNvSpPr txBox="true"/>
-          <p:nvPr/>
-        </p:nvSpPr>
-        <p:spPr>
-          <a:xfrm rot="0">
-            <a:off x="10350500" y="1041400"/>
-            <a:ext cx="6845300" cy="279400"/>
-          </a:xfrm>
-          <a:prstGeom prst="rect">
-            <a:avLst/>
-          </a:prstGeom>
-        </p:spPr>
-        <p:txBody>
-          <a:bodyPr anchor="ctr" rtlCol="false" lIns="0" tIns="0" rIns="0" bIns="0"/>
-          <a:lstStyle/>
-          <a:p>
-            <a:pPr algn="r" lvl="0">
-              <a:lnSpc>
-                <a:spcPct val="108729"/>
-              </a:lnSpc>
-            </a:pPr>
-            <a:r>
-              <a:rPr lang="en-US" sz="1600" b="false" i="false" u="none" strike="noStrike" spc="100">
-                <a:solidFill>
-                  <a:srgbClr val="B0966E"/>
-                </a:solidFill>
-                <a:latin typeface="Pretendard Medium"/>
-              </a:rPr>
-              <a:t>PAGE 07</a:t>
             </a:r>
           </a:p>
         </p:txBody>
@@ -7190,42 +7055,6 @@
       </p:sp>
       <p:sp>
         <p:nvSpPr>
-          <p:cNvPr name="TextBox 11" id="11"/>
-          <p:cNvSpPr txBox="true"/>
-          <p:nvPr/>
-        </p:nvSpPr>
-        <p:spPr>
-          <a:xfrm rot="0">
-            <a:off x="10350500" y="1041400"/>
-            <a:ext cx="6845300" cy="279400"/>
-          </a:xfrm>
-          <a:prstGeom prst="rect">
-            <a:avLst/>
-          </a:prstGeom>
-        </p:spPr>
-        <p:txBody>
-          <a:bodyPr anchor="ctr" rtlCol="false" lIns="0" tIns="0" rIns="0" bIns="0"/>
-          <a:lstStyle/>
-          <a:p>
-            <a:pPr algn="r" lvl="0">
-              <a:lnSpc>
-                <a:spcPct val="108729"/>
-              </a:lnSpc>
-            </a:pPr>
-            <a:r>
-              <a:rPr lang="en-US" sz="1600" b="false" i="false" u="none" strike="noStrike" spc="100">
-                <a:solidFill>
-                  <a:srgbClr val="B0966E"/>
-                </a:solidFill>
-                <a:latin typeface="Pretendard Medium"/>
-              </a:rPr>
-              <a:t>PAGE 07</a:t>
-            </a:r>
-          </a:p>
-        </p:txBody>
-      </p:sp>
-      <p:sp>
-        <p:nvSpPr>
           <p:cNvPr name="TextBox 12" id="12"/>
           <p:cNvSpPr txBox="true"/>
           <p:nvPr/>
@@ -7620,12 +7449,12 @@
 </file>
 
 <file path=ppt/slides/slide15.xml><?xml version="1.0" encoding="utf-8"?>
-<p:sld xmlns:p="http://schemas.openxmlformats.org/presentationml/2006/main" xmlns:a="http://schemas.openxmlformats.org/drawingml/2006/main" xmlns:r="http://schemas.openxmlformats.org/officeDocument/2006/relationships">
+<p:sld xmlns:r="http://schemas.openxmlformats.org/officeDocument/2006/relationships" xmlns:c="http://schemas.openxmlformats.org/drawingml/2006/chart" xmlns:a="http://schemas.openxmlformats.org/drawingml/2006/main" xmlns:dgm="http://schemas.openxmlformats.org/drawingml/2006/diagram" xmlns:dsp="http://schemas.microsoft.com/office/drawing/2008/diagram" xmlns:p="http://schemas.openxmlformats.org/presentationml/2006/main">
   <p:cSld>
     <p:bg>
-      <p:bgPr>
+      <p:bgPr shadeToTitle="0">
         <a:solidFill>
-          <a:srgbClr val="EFEBE7"/>
+          <a:srgbClr val="efebe7"/>
         </a:solidFill>
       </p:bgPr>
     </p:bg>
@@ -7748,7 +7577,7 @@
           <p:nvPr/>
         </p:nvPicPr>
         <p:blipFill>
-          <a:blip r:embed="rId5"/>
+          <a:blip r:embed="rId6"/>
           <a:stretch>
             <a:fillRect/>
           </a:stretch>
@@ -7772,7 +7601,7 @@
           <p:nvPr/>
         </p:nvPicPr>
         <p:blipFill>
-          <a:blip r:embed="rId6"/>
+          <a:blip r:embed="rId7"/>
           <a:stretch>
             <a:fillRect/>
           </a:stretch>
@@ -7787,42 +7616,6 @@
           </a:prstGeom>
         </p:spPr>
       </p:pic>
-      <p:sp>
-        <p:nvSpPr>
-          <p:cNvPr name="TextBox 8" id="8"/>
-          <p:cNvSpPr txBox="true"/>
-          <p:nvPr/>
-        </p:nvSpPr>
-        <p:spPr>
-          <a:xfrm rot="0">
-            <a:off x="10350500" y="1041400"/>
-            <a:ext cx="6845300" cy="279400"/>
-          </a:xfrm>
-          <a:prstGeom prst="rect">
-            <a:avLst/>
-          </a:prstGeom>
-        </p:spPr>
-        <p:txBody>
-          <a:bodyPr anchor="ctr" rtlCol="false" lIns="0" tIns="0" rIns="0" bIns="0"/>
-          <a:lstStyle/>
-          <a:p>
-            <a:pPr algn="r" lvl="0">
-              <a:lnSpc>
-                <a:spcPct val="108729"/>
-              </a:lnSpc>
-            </a:pPr>
-            <a:r>
-              <a:rPr lang="en-US" sz="1600" b="false" i="false" u="none" strike="noStrike" spc="100">
-                <a:solidFill>
-                  <a:srgbClr val="B0966E"/>
-                </a:solidFill>
-                <a:latin typeface="Pretendard Medium"/>
-              </a:rPr>
-              <a:t>PAGE 07</a:t>
-            </a:r>
-          </a:p>
-        </p:txBody>
-      </p:sp>
       <p:sp>
         <p:nvSpPr>
           <p:cNvPr name="TextBox 9" id="9"/>
@@ -8395,12 +8188,12 @@
 </file>
 
 <file path=ppt/slides/slide16.xml><?xml version="1.0" encoding="utf-8"?>
-<p:sld xmlns:p="http://schemas.openxmlformats.org/presentationml/2006/main" xmlns:a="http://schemas.openxmlformats.org/drawingml/2006/main" xmlns:r="http://schemas.openxmlformats.org/officeDocument/2006/relationships">
+<p:sld xmlns:r="http://schemas.openxmlformats.org/officeDocument/2006/relationships" xmlns:c="http://schemas.openxmlformats.org/drawingml/2006/chart" xmlns:a="http://schemas.openxmlformats.org/drawingml/2006/main" xmlns:dgm="http://schemas.openxmlformats.org/drawingml/2006/diagram" xmlns:dsp="http://schemas.microsoft.com/office/drawing/2008/diagram" xmlns:p="http://schemas.openxmlformats.org/presentationml/2006/main">
   <p:cSld>
     <p:bg>
-      <p:bgPr>
+      <p:bgPr shadeToTitle="0">
         <a:solidFill>
-          <a:srgbClr val="EFEBE7"/>
+          <a:srgbClr val="efebe7"/>
         </a:solidFill>
       </p:bgPr>
     </p:bg>
@@ -8523,7 +8316,7 @@
           <p:nvPr/>
         </p:nvPicPr>
         <p:blipFill>
-          <a:blip r:embed="rId5"/>
+          <a:blip r:embed="rId6"/>
           <a:stretch>
             <a:fillRect/>
           </a:stretch>
@@ -8547,7 +8340,7 @@
           <p:nvPr/>
         </p:nvPicPr>
         <p:blipFill>
-          <a:blip r:embed="rId6"/>
+          <a:blip r:embed="rId7"/>
           <a:stretch>
             <a:fillRect/>
           </a:stretch>
@@ -8562,42 +8355,6 @@
           </a:prstGeom>
         </p:spPr>
       </p:pic>
-      <p:sp>
-        <p:nvSpPr>
-          <p:cNvPr name="TextBox 8" id="8"/>
-          <p:cNvSpPr txBox="true"/>
-          <p:nvPr/>
-        </p:nvSpPr>
-        <p:spPr>
-          <a:xfrm rot="0">
-            <a:off x="10350500" y="1041400"/>
-            <a:ext cx="6845300" cy="279400"/>
-          </a:xfrm>
-          <a:prstGeom prst="rect">
-            <a:avLst/>
-          </a:prstGeom>
-        </p:spPr>
-        <p:txBody>
-          <a:bodyPr anchor="ctr" rtlCol="false" lIns="0" tIns="0" rIns="0" bIns="0"/>
-          <a:lstStyle/>
-          <a:p>
-            <a:pPr algn="r" lvl="0">
-              <a:lnSpc>
-                <a:spcPct val="108729"/>
-              </a:lnSpc>
-            </a:pPr>
-            <a:r>
-              <a:rPr lang="en-US" sz="1600" b="false" i="false" u="none" strike="noStrike" spc="100">
-                <a:solidFill>
-                  <a:srgbClr val="B0966E"/>
-                </a:solidFill>
-                <a:latin typeface="Pretendard Medium"/>
-              </a:rPr>
-              <a:t>PAGE 07</a:t>
-            </a:r>
-          </a:p>
-        </p:txBody>
-      </p:sp>
       <p:sp>
         <p:nvSpPr>
           <p:cNvPr name="TextBox 9" id="9"/>
@@ -9231,42 +8988,6 @@
       </p:pic>
       <p:sp>
         <p:nvSpPr>
-          <p:cNvPr name="TextBox 8" id="8"/>
-          <p:cNvSpPr txBox="true"/>
-          <p:nvPr/>
-        </p:nvSpPr>
-        <p:spPr>
-          <a:xfrm rot="0">
-            <a:off x="10350500" y="1041400"/>
-            <a:ext cx="6845300" cy="279400"/>
-          </a:xfrm>
-          <a:prstGeom prst="rect">
-            <a:avLst/>
-          </a:prstGeom>
-        </p:spPr>
-        <p:txBody>
-          <a:bodyPr anchor="ctr" rtlCol="false" lIns="0" tIns="0" rIns="0" bIns="0"/>
-          <a:lstStyle/>
-          <a:p>
-            <a:pPr algn="r" lvl="0">
-              <a:lnSpc>
-                <a:spcPct val="108729"/>
-              </a:lnSpc>
-            </a:pPr>
-            <a:r>
-              <a:rPr lang="en-US" sz="1600" b="false" i="false" u="none" strike="noStrike" spc="100">
-                <a:solidFill>
-                  <a:srgbClr val="B0966E"/>
-                </a:solidFill>
-                <a:latin typeface="Pretendard Medium"/>
-              </a:rPr>
-              <a:t>PAGE 07</a:t>
-            </a:r>
-          </a:p>
-        </p:txBody>
-      </p:sp>
-      <p:sp>
-        <p:nvSpPr>
           <p:cNvPr name="TextBox 9" id="9"/>
           <p:cNvSpPr txBox="true"/>
           <p:nvPr/>
@@ -10891,42 +10612,6 @@
           </a:p>
         </p:txBody>
       </p:sp>
-      <p:sp>
-        <p:nvSpPr>
-          <p:cNvPr name="TextBox 11" id="11"/>
-          <p:cNvSpPr txBox="true"/>
-          <p:nvPr/>
-        </p:nvSpPr>
-        <p:spPr>
-          <a:xfrm rot="0">
-            <a:off x="10350500" y="1041400"/>
-            <a:ext cx="6845300" cy="279400"/>
-          </a:xfrm>
-          <a:prstGeom prst="rect">
-            <a:avLst/>
-          </a:prstGeom>
-        </p:spPr>
-        <p:txBody>
-          <a:bodyPr anchor="ctr" rtlCol="false" lIns="0" tIns="0" rIns="0" bIns="0"/>
-          <a:lstStyle/>
-          <a:p>
-            <a:pPr algn="r" lvl="0">
-              <a:lnSpc>
-                <a:spcPct val="108729"/>
-              </a:lnSpc>
-            </a:pPr>
-            <a:r>
-              <a:rPr lang="en-US" sz="1600" b="false" i="false" u="none" strike="noStrike" spc="100">
-                <a:solidFill>
-                  <a:srgbClr val="B0966E"/>
-                </a:solidFill>
-                <a:latin typeface="Pretendard Medium"/>
-              </a:rPr>
-              <a:t>PAGE 07</a:t>
-            </a:r>
-          </a:p>
-        </p:txBody>
-      </p:sp>
     </p:spTree>
   </p:cSld>
   <p:clrMapOvr>
@@ -11766,42 +11451,6 @@
                 <a:ea typeface="esamanru OTF Bold"/>
               </a:rPr>
               <a:t>기여</a:t>
-            </a:r>
-          </a:p>
-        </p:txBody>
-      </p:sp>
-      <p:sp>
-        <p:nvSpPr>
-          <p:cNvPr name="TextBox 11" id="11"/>
-          <p:cNvSpPr txBox="true"/>
-          <p:nvPr/>
-        </p:nvSpPr>
-        <p:spPr>
-          <a:xfrm rot="0">
-            <a:off x="10350500" y="1041400"/>
-            <a:ext cx="6845300" cy="279400"/>
-          </a:xfrm>
-          <a:prstGeom prst="rect">
-            <a:avLst/>
-          </a:prstGeom>
-        </p:spPr>
-        <p:txBody>
-          <a:bodyPr anchor="ctr" rtlCol="false" lIns="0" tIns="0" rIns="0" bIns="0"/>
-          <a:lstStyle/>
-          <a:p>
-            <a:pPr algn="r" lvl="0">
-              <a:lnSpc>
-                <a:spcPct val="108729"/>
-              </a:lnSpc>
-            </a:pPr>
-            <a:r>
-              <a:rPr lang="en-US" sz="1600" b="false" i="false" u="none" strike="noStrike" spc="100">
-                <a:solidFill>
-                  <a:srgbClr val="B0966E"/>
-                </a:solidFill>
-                <a:latin typeface="Pretendard Medium"/>
-              </a:rPr>
-              <a:t>PAGE 07</a:t>
             </a:r>
           </a:p>
         </p:txBody>
@@ -13008,12 +12657,12 @@
 </file>
 
 <file path=ppt/slides/slide20.xml><?xml version="1.0" encoding="utf-8"?>
-<p:sld xmlns:p="http://schemas.openxmlformats.org/presentationml/2006/main" xmlns:a="http://schemas.openxmlformats.org/drawingml/2006/main" xmlns:r="http://schemas.openxmlformats.org/officeDocument/2006/relationships">
+<p:sld xmlns:r="http://schemas.openxmlformats.org/officeDocument/2006/relationships" xmlns:c="http://schemas.openxmlformats.org/drawingml/2006/chart" xmlns:a="http://schemas.openxmlformats.org/drawingml/2006/main" xmlns:dgm="http://schemas.openxmlformats.org/drawingml/2006/diagram" xmlns:dsp="http://schemas.microsoft.com/office/drawing/2008/diagram" xmlns:p="http://schemas.openxmlformats.org/presentationml/2006/main">
   <p:cSld>
     <p:bg>
-      <p:bgPr>
+      <p:bgPr shadeToTitle="0">
         <a:solidFill>
-          <a:srgbClr val="EFEBE7"/>
+          <a:srgbClr val="efebe7"/>
         </a:solidFill>
       </p:bgPr>
     </p:bg>
@@ -13136,7 +12785,7 @@
           <p:nvPr/>
         </p:nvPicPr>
         <p:blipFill>
-          <a:blip r:embed="rId5"/>
+          <a:blip r:embed="rId6"/>
           <a:stretch>
             <a:fillRect/>
           </a:stretch>
@@ -13160,7 +12809,7 @@
           <p:nvPr/>
         </p:nvPicPr>
         <p:blipFill>
-          <a:blip r:embed="rId6"/>
+          <a:blip r:embed="rId7"/>
           <a:stretch>
             <a:fillRect/>
           </a:stretch>
@@ -13184,7 +12833,7 @@
           <p:nvPr/>
         </p:nvPicPr>
         <p:blipFill>
-          <a:blip r:embed="rId7"/>
+          <a:blip r:embed="rId8"/>
           <a:stretch>
             <a:fillRect/>
           </a:stretch>
@@ -13208,7 +12857,7 @@
           <p:nvPr/>
         </p:nvPicPr>
         <p:blipFill>
-          <a:blip r:embed="rId8"/>
+          <a:blip r:embed="rId9"/>
           <a:stretch>
             <a:fillRect/>
           </a:stretch>
@@ -13300,42 +12949,6 @@
                 <a:ea typeface="esamanru OTF Bold"/>
               </a:rPr>
               <a:t>기여</a:t>
-            </a:r>
-          </a:p>
-        </p:txBody>
-      </p:sp>
-      <p:sp>
-        <p:nvSpPr>
-          <p:cNvPr name="TextBox 11" id="11"/>
-          <p:cNvSpPr txBox="true"/>
-          <p:nvPr/>
-        </p:nvSpPr>
-        <p:spPr>
-          <a:xfrm rot="0">
-            <a:off x="10350500" y="1041400"/>
-            <a:ext cx="6845300" cy="279400"/>
-          </a:xfrm>
-          <a:prstGeom prst="rect">
-            <a:avLst/>
-          </a:prstGeom>
-        </p:spPr>
-        <p:txBody>
-          <a:bodyPr anchor="ctr" rtlCol="false" lIns="0" tIns="0" rIns="0" bIns="0"/>
-          <a:lstStyle/>
-          <a:p>
-            <a:pPr algn="r" lvl="0">
-              <a:lnSpc>
-                <a:spcPct val="108729"/>
-              </a:lnSpc>
-            </a:pPr>
-            <a:r>
-              <a:rPr lang="en-US" sz="1600" b="false" i="false" u="none" strike="noStrike" spc="100">
-                <a:solidFill>
-                  <a:srgbClr val="B0966E"/>
-                </a:solidFill>
-                <a:latin typeface="Pretendard Medium"/>
-              </a:rPr>
-              <a:t>PAGE 07</a:t>
             </a:r>
           </a:p>
         </p:txBody>
@@ -14314,42 +13927,6 @@
           </a:p>
         </p:txBody>
       </p:sp>
-      <p:sp>
-        <p:nvSpPr>
-          <p:cNvPr name="TextBox 11" id="11"/>
-          <p:cNvSpPr txBox="true"/>
-          <p:nvPr/>
-        </p:nvSpPr>
-        <p:spPr>
-          <a:xfrm rot="0">
-            <a:off x="10350500" y="1041400"/>
-            <a:ext cx="6845300" cy="279400"/>
-          </a:xfrm>
-          <a:prstGeom prst="rect">
-            <a:avLst/>
-          </a:prstGeom>
-        </p:spPr>
-        <p:txBody>
-          <a:bodyPr anchor="ctr" rtlCol="false" lIns="0" tIns="0" rIns="0" bIns="0"/>
-          <a:lstStyle/>
-          <a:p>
-            <a:pPr algn="r" lvl="0">
-              <a:lnSpc>
-                <a:spcPct val="108729"/>
-              </a:lnSpc>
-            </a:pPr>
-            <a:r>
-              <a:rPr lang="en-US" sz="1600" b="false" i="false" u="none" strike="noStrike" spc="100">
-                <a:solidFill>
-                  <a:srgbClr val="B0966E"/>
-                </a:solidFill>
-                <a:latin typeface="Pretendard Medium"/>
-              </a:rPr>
-              <a:t>PAGE 07</a:t>
-            </a:r>
-          </a:p>
-        </p:txBody>
-      </p:sp>
     </p:spTree>
   </p:cSld>
   <p:clrMapOvr>
@@ -14941,42 +14518,6 @@
                 <a:ea typeface="esamanru OTF Bold"/>
               </a:rPr>
               <a:t>캠페인</a:t>
-            </a:r>
-          </a:p>
-        </p:txBody>
-      </p:sp>
-      <p:sp>
-        <p:nvSpPr>
-          <p:cNvPr name="TextBox 11" id="11"/>
-          <p:cNvSpPr txBox="true"/>
-          <p:nvPr/>
-        </p:nvSpPr>
-        <p:spPr>
-          <a:xfrm rot="0">
-            <a:off x="10350500" y="1041400"/>
-            <a:ext cx="6845300" cy="279400"/>
-          </a:xfrm>
-          <a:prstGeom prst="rect">
-            <a:avLst/>
-          </a:prstGeom>
-        </p:spPr>
-        <p:txBody>
-          <a:bodyPr anchor="ctr" rtlCol="false" lIns="0" tIns="0" rIns="0" bIns="0"/>
-          <a:lstStyle/>
-          <a:p>
-            <a:pPr algn="r" lvl="0">
-              <a:lnSpc>
-                <a:spcPct val="108729"/>
-              </a:lnSpc>
-            </a:pPr>
-            <a:r>
-              <a:rPr lang="en-US" sz="1600" b="false" i="false" u="none" strike="noStrike" spc="100">
-                <a:solidFill>
-                  <a:srgbClr val="B0966E"/>
-                </a:solidFill>
-                <a:latin typeface="Pretendard Medium"/>
-              </a:rPr>
-              <a:t>PAGE 07</a:t>
             </a:r>
           </a:p>
         </p:txBody>
@@ -15189,7 +14730,7 @@
         </p:nvSpPr>
         <p:spPr>
           <a:xfrm>
-            <a:off x="2768600" y="4127500"/>
+            <a:off x="2768600" y="4470400"/>
             <a:ext cx="12750800" cy="2806700"/>
           </a:xfrm>
           <a:prstGeom prst="rect">
@@ -15222,7 +14763,7 @@
                 </a:solidFill>
                 <a:ea typeface="Pretendard Bold"/>
               </a:rPr>
-              <a:t>지역</a:t>
+              <a:t>의정부에서</a:t>
             </a:r>
             <a:r>
               <a:rPr lang="en-US" sz="4900" b="0" i="0" u="none" strike="noStrike">
@@ -15240,7 +14781,7 @@
                 </a:solidFill>
                 <a:ea typeface="Pretendard Bold"/>
               </a:rPr>
-              <a:t>중심</a:t>
+              <a:t>전국으로</a:t>
             </a:r>
             <a:r>
               <a:rPr lang="en-US" sz="4900" b="0" i="0" u="none" strike="noStrike">
@@ -15258,7 +14799,7 @@
                 </a:solidFill>
                 <a:ea typeface="Pretendard Bold"/>
               </a:rPr>
-              <a:t>탄소중립</a:t>
+              <a:t>확산되는</a:t>
             </a:r>
             <a:r>
               <a:rPr lang="en-US" sz="4900" b="0" i="0" u="none" strike="noStrike">
@@ -15276,7 +14817,7 @@
                 </a:solidFill>
                 <a:ea typeface="Pretendard Bold"/>
               </a:rPr>
-              <a:t>체험</a:t>
+              <a:t>시민참여</a:t>
             </a:r>
             <a:r>
               <a:rPr lang="en-US" sz="4900" b="0" i="0" u="none" strike="noStrike">
@@ -15294,25 +14835,7 @@
                 </a:solidFill>
                 <a:ea typeface="Pretendard Bold"/>
               </a:rPr>
-              <a:t>플랫폼</a:t>
-            </a:r>
-            <a:r>
-              <a:rPr lang="en-US" sz="4900" b="0" i="0" u="none" strike="noStrike">
-                <a:solidFill>
-                  <a:srgbClr val="715130"/>
-                </a:solidFill>
-                <a:latin typeface="Pretendard Bold"/>
-              </a:rPr>
-              <a:t> </a:t>
-            </a:r>
-            <a:r>
-              <a:rPr lang="ko-KR" sz="4900" b="0" i="0" u="none" strike="noStrike">
-                <a:solidFill>
-                  <a:srgbClr val="715130"/>
-                </a:solidFill>
-                <a:ea typeface="Pretendard Bold"/>
-              </a:rPr>
-              <a:t>구축</a:t>
+              <a:t>모델</a:t>
             </a:r>
             <a:endParaRPr lang="ko-KR" sz="4900" b="0" i="0" u="none" strike="noStrike">
               <a:solidFill>
@@ -15448,7 +14971,7 @@
                 </a:solidFill>
                 <a:ea typeface="Pretendard Bold"/>
               </a:rPr>
-              <a:t>의정부에서</a:t>
+              <a:t>지역</a:t>
             </a:r>
             <a:r>
               <a:rPr lang="en-US" sz="4900" b="0" i="0" u="none" strike="noStrike">
@@ -15466,7 +14989,7 @@
                 </a:solidFill>
                 <a:ea typeface="Pretendard Bold"/>
               </a:rPr>
-              <a:t>전국으로</a:t>
+              <a:t>중심</a:t>
             </a:r>
             <a:r>
               <a:rPr lang="en-US" sz="4900" b="0" i="0" u="none" strike="noStrike">
@@ -15484,7 +15007,7 @@
                 </a:solidFill>
                 <a:ea typeface="Pretendard Bold"/>
               </a:rPr>
-              <a:t>확산되는</a:t>
+              <a:t>탄소중립</a:t>
             </a:r>
             <a:r>
               <a:rPr lang="en-US" sz="4900" b="0" i="0" u="none" strike="noStrike">
@@ -15502,7 +15025,7 @@
                 </a:solidFill>
                 <a:ea typeface="Pretendard Bold"/>
               </a:rPr>
-              <a:t>시민참여</a:t>
+              <a:t>체험</a:t>
             </a:r>
             <a:r>
               <a:rPr lang="en-US" sz="4900" b="0" i="0" u="none" strike="noStrike">
@@ -15520,7 +15043,25 @@
                 </a:solidFill>
                 <a:ea typeface="Pretendard Bold"/>
               </a:rPr>
-              <a:t>모델</a:t>
+              <a:t>플랫폼</a:t>
+            </a:r>
+            <a:r>
+              <a:rPr lang="en-US" sz="4900" b="0" i="0" u="none" strike="noStrike">
+                <a:solidFill>
+                  <a:srgbClr val="715130"/>
+                </a:solidFill>
+                <a:latin typeface="Pretendard Bold"/>
+              </a:rPr>
+              <a:t> </a:t>
+            </a:r>
+            <a:r>
+              <a:rPr lang="ko-KR" sz="4900" b="0" i="0" u="none" strike="noStrike">
+                <a:solidFill>
+                  <a:srgbClr val="715130"/>
+                </a:solidFill>
+                <a:ea typeface="Pretendard Bold"/>
+              </a:rPr>
+              <a:t>구축</a:t>
             </a:r>
             <a:endParaRPr lang="ko-KR" sz="4900" b="0" i="0" u="none" strike="noStrike">
               <a:solidFill>
@@ -15529,6 +15070,20 @@
               <a:ea typeface="Pretendard Bold"/>
             </a:endParaRPr>
           </a:p>
+          <a:p>
+            <a:pPr lvl="0" algn="l">
+              <a:lnSpc>
+                <a:spcPct val="128649"/>
+              </a:lnSpc>
+              <a:defRPr/>
+            </a:pPr>
+            <a:endParaRPr lang="ko-KR" sz="4900" b="0" i="0" u="none" strike="noStrike">
+              <a:solidFill>
+                <a:srgbClr val="715130"/>
+              </a:solidFill>
+              <a:ea typeface="Pretendard Bold"/>
+            </a:endParaRPr>
+          </a:p>
         </p:txBody>
       </p:sp>
       <p:sp>
@@ -15581,42 +15136,6 @@
                 <a:ea typeface="esamanru OTF Bold"/>
               </a:rPr>
               <a:t>비전</a:t>
-            </a:r>
-          </a:p>
-        </p:txBody>
-      </p:sp>
-      <p:sp>
-        <p:nvSpPr>
-          <p:cNvPr name="TextBox 11" id="11"/>
-          <p:cNvSpPr txBox="true"/>
-          <p:nvPr/>
-        </p:nvSpPr>
-        <p:spPr>
-          <a:xfrm rot="0">
-            <a:off x="10350500" y="1041400"/>
-            <a:ext cx="6845300" cy="279400"/>
-          </a:xfrm>
-          <a:prstGeom prst="rect">
-            <a:avLst/>
-          </a:prstGeom>
-        </p:spPr>
-        <p:txBody>
-          <a:bodyPr anchor="ctr" rtlCol="false" lIns="0" tIns="0" rIns="0" bIns="0"/>
-          <a:lstStyle/>
-          <a:p>
-            <a:pPr algn="r" lvl="0">
-              <a:lnSpc>
-                <a:spcPct val="108729"/>
-              </a:lnSpc>
-            </a:pPr>
-            <a:r>
-              <a:rPr lang="en-US" sz="1600" b="false" i="false" u="none" strike="noStrike" spc="100">
-                <a:solidFill>
-                  <a:srgbClr val="B0966E"/>
-                </a:solidFill>
-                <a:latin typeface="Pretendard Medium"/>
-              </a:rPr>
-              <a:t>PAGE 07</a:t>
             </a:r>
           </a:p>
         </p:txBody>
@@ -15630,12 +15149,12 @@
 </file>
 
 <file path=ppt/slides/slide24.xml><?xml version="1.0" encoding="utf-8"?>
-<p:sld xmlns:p="http://schemas.openxmlformats.org/presentationml/2006/main" xmlns:a="http://schemas.openxmlformats.org/drawingml/2006/main" xmlns:r="http://schemas.openxmlformats.org/officeDocument/2006/relationships">
+<p:sld xmlns:r="http://schemas.openxmlformats.org/officeDocument/2006/relationships" xmlns:c="http://schemas.openxmlformats.org/drawingml/2006/chart" xmlns:a="http://schemas.openxmlformats.org/drawingml/2006/main" xmlns:dgm="http://schemas.openxmlformats.org/drawingml/2006/diagram" xmlns:dsp="http://schemas.microsoft.com/office/drawing/2008/diagram" xmlns:p="http://schemas.openxmlformats.org/presentationml/2006/main">
   <p:cSld>
     <p:bg>
-      <p:bgPr>
+      <p:bgPr shadeToTitle="0">
         <a:solidFill>
-          <a:srgbClr val="EFEBE7"/>
+          <a:srgbClr val="efebe7"/>
         </a:solidFill>
       </p:bgPr>
     </p:bg>
@@ -15758,7 +15277,7 @@
           <p:nvPr/>
         </p:nvPicPr>
         <p:blipFill>
-          <a:blip r:embed="rId5"/>
+          <a:blip r:embed="rId6"/>
           <a:stretch>
             <a:fillRect/>
           </a:stretch>
@@ -15782,7 +15301,7 @@
           <p:nvPr/>
         </p:nvPicPr>
         <p:blipFill>
-          <a:blip r:embed="rId6"/>
+          <a:blip r:embed="rId7"/>
           <a:stretch>
             <a:fillRect/>
           </a:stretch>
@@ -15838,42 +15357,6 @@
                 <a:latin typeface="esamanru OTF Bold"/>
               </a:rPr>
               <a:t>.</a:t>
-            </a:r>
-          </a:p>
-        </p:txBody>
-      </p:sp>
-      <p:sp>
-        <p:nvSpPr>
-          <p:cNvPr name="TextBox 9" id="9"/>
-          <p:cNvSpPr txBox="true"/>
-          <p:nvPr/>
-        </p:nvSpPr>
-        <p:spPr>
-          <a:xfrm rot="0">
-            <a:off x="10350500" y="1041400"/>
-            <a:ext cx="6845300" cy="279400"/>
-          </a:xfrm>
-          <a:prstGeom prst="rect">
-            <a:avLst/>
-          </a:prstGeom>
-        </p:spPr>
-        <p:txBody>
-          <a:bodyPr anchor="ctr" rtlCol="false" lIns="0" tIns="0" rIns="0" bIns="0"/>
-          <a:lstStyle/>
-          <a:p>
-            <a:pPr algn="r" lvl="0">
-              <a:lnSpc>
-                <a:spcPct val="108729"/>
-              </a:lnSpc>
-            </a:pPr>
-            <a:r>
-              <a:rPr lang="en-US" sz="1600" b="false" i="false" u="none" strike="noStrike" spc="100">
-                <a:solidFill>
-                  <a:srgbClr val="B0966E"/>
-                </a:solidFill>
-                <a:latin typeface="Pretendard Medium"/>
-              </a:rPr>
-              <a:t>PAGE 07</a:t>
             </a:r>
           </a:p>
         </p:txBody>
@@ -18390,76 +17873,67 @@
                 </a:solidFill>
                 <a:ea typeface="esamanru OTF Bold"/>
               </a:rPr>
+              <a:t> 의정부시 </a:t>
+            </a:r>
+            <a:r>
+              <a:rPr lang="ko-KR" sz="2800" b="0" i="0" u="none" strike="noStrike">
+                <a:solidFill>
+                  <a:srgbClr val="000000"/>
+                </a:solidFill>
+                <a:ea typeface="esamanru OTF Bold"/>
+              </a:rPr>
+              <a:t>평생학습원</a:t>
+            </a:r>
+            <a:r>
+              <a:rPr lang="en-US" sz="2800" b="0" i="0" u="none" strike="noStrike">
+                <a:solidFill>
+                  <a:srgbClr val="000000"/>
+                </a:solidFill>
+                <a:latin typeface="esamanru OTF Bold"/>
+              </a:rPr>
+              <a:t>, </a:t>
+            </a:r>
+            <a:r>
+              <a:rPr lang="ko-KR" altLang="en-US" sz="2800" b="0" i="0" u="none" strike="noStrike">
+                <a:solidFill>
+                  <a:srgbClr val="000000"/>
+                </a:solidFill>
+                <a:ea typeface="esamanru OTF Bold"/>
+              </a:rPr>
+              <a:t>의정부시 청</a:t>
+            </a:r>
+            <a:r>
+              <a:rPr lang="ko-KR" sz="2800" b="0" i="0" u="none" strike="noStrike">
+                <a:solidFill>
+                  <a:srgbClr val="000000"/>
+                </a:solidFill>
+                <a:ea typeface="esamanru OTF Bold"/>
+              </a:rPr>
+              <a:t>소년수련관</a:t>
+            </a:r>
+            <a:r>
+              <a:rPr lang="en-US" sz="2800" b="0" i="0" u="none" strike="noStrike">
+                <a:solidFill>
+                  <a:srgbClr val="000000"/>
+                </a:solidFill>
+                <a:latin typeface="esamanru OTF Bold"/>
+              </a:rPr>
+              <a:t>, </a:t>
+            </a:r>
+            <a:r>
+              <a:rPr lang="ko-KR" altLang="en-US" sz="2800" b="0" i="0" u="none" strike="noStrike">
+                <a:solidFill>
+                  <a:srgbClr val="000000"/>
+                </a:solidFill>
+                <a:ea typeface="esamanru OTF Bold"/>
+              </a:rPr>
               <a:t>교육부 꿈길 체험공방</a:t>
             </a:r>
-            <a:r>
-              <a:rPr lang="en-US" altLang="ko-KR" sz="2800" b="0" i="0" u="none" strike="noStrike">
-                <a:solidFill>
-                  <a:srgbClr val="000000"/>
-                </a:solidFill>
-                <a:ea typeface="esamanru OTF Bold"/>
-              </a:rPr>
-              <a:t>,</a:t>
-            </a:r>
-            <a:r>
-              <a:rPr lang="ko-KR" altLang="en-US" sz="2800" b="0" i="0" u="none" strike="noStrike">
-                <a:solidFill>
-                  <a:srgbClr val="000000"/>
-                </a:solidFill>
-                <a:ea typeface="esamanru OTF Bold"/>
-              </a:rPr>
-              <a:t> 의정부시 </a:t>
-            </a:r>
-            <a:r>
-              <a:rPr lang="ko-KR" sz="2800" b="0" i="0" u="none" strike="noStrike">
-                <a:solidFill>
-                  <a:srgbClr val="000000"/>
-                </a:solidFill>
-                <a:ea typeface="esamanru OTF Bold"/>
-              </a:rPr>
-              <a:t>평생학습원</a:t>
-            </a:r>
-            <a:r>
-              <a:rPr lang="en-US" sz="2800" b="0" i="0" u="none" strike="noStrike">
-                <a:solidFill>
-                  <a:srgbClr val="000000"/>
-                </a:solidFill>
-                <a:latin typeface="esamanru OTF Bold"/>
-              </a:rPr>
-              <a:t>, </a:t>
-            </a:r>
-            <a:r>
-              <a:rPr lang="ko-KR" altLang="en-US" sz="2800" b="0" i="0" u="none" strike="noStrike">
-                <a:solidFill>
-                  <a:srgbClr val="000000"/>
-                </a:solidFill>
-                <a:ea typeface="esamanru OTF Bold"/>
-              </a:rPr>
-              <a:t>의정부시 청</a:t>
-            </a:r>
-            <a:r>
-              <a:rPr lang="ko-KR" sz="2800" b="0" i="0" u="none" strike="noStrike">
-                <a:solidFill>
-                  <a:srgbClr val="000000"/>
-                </a:solidFill>
-                <a:ea typeface="esamanru OTF Bold"/>
-              </a:rPr>
-              <a:t>소년수련관</a:t>
-            </a:r>
-            <a:r>
-              <a:rPr lang="en-US" sz="2800" b="0" i="0" u="none" strike="noStrike">
-                <a:solidFill>
-                  <a:srgbClr val="000000"/>
-                </a:solidFill>
-                <a:latin typeface="esamanru OTF Bold"/>
-              </a:rPr>
-              <a:t>, </a:t>
-            </a:r>
-            <a:endParaRPr lang="ko-KR" sz="2800" b="0" i="0" u="none" strike="noStrike">
+            <a:endParaRPr lang="en-US" sz="2800" b="0" i="0" u="none" strike="noStrike">
               <a:solidFill>
                 <a:srgbClr val="000000"/>
               </a:solidFill>
-              <a:ea typeface="esamanru OTF Bold"/>
+              <a:latin typeface="esamanru OTF Bold"/>
             </a:endParaRPr>
           </a:p>
           <a:p>
